--- a/artifacts/mdpr-vs-skill/mdpr-skill-from-actual-md-run.pptx
+++ b/artifacts/mdpr-vs-skill/mdpr-skill-from-actual-md-run.pptx
@@ -163,13 +163,13 @@
                 <c:formatCode>General</c:formatCode>
                 <c:ptCount val="3"/>
                 <c:pt idx="0">
-                  <c:v>128</c:v>
+                  <c:v>126</c:v>
                 </c:pt>
                 <c:pt idx="1">
-                  <c:v>39</c:v>
+                  <c:v>41</c:v>
                 </c:pt>
                 <c:pt idx="2">
-                  <c:v>27</c:v>
+                  <c:v>13</c:v>
                 </c:pt>
               </c:numCache>
             </c:numRef>
@@ -3701,7 +3701,7 @@
                   <a:srgbClr val="5F6B7A"/>
                 </a:solidFill>
               </a:rPr>
-              <a:t>24 files from .cache/mdpr</a:t>
+              <a:t>21 files from .cache/mdpr</a:t>
             </a:r>
           </a:p>
         </p:txBody>
@@ -3734,7 +3734,7 @@
                   <a:srgbClr val="5F6B7A"/>
                 </a:solidFill>
               </a:rPr>
-              <a:t>194 headings</a:t>
+              <a:t>180 headings</a:t>
             </a:r>
           </a:p>
         </p:txBody>
@@ -3767,7 +3767,7 @@
                   <a:srgbClr val="5F6B7A"/>
                 </a:solidFill>
               </a:rPr>
-              <a:t>55,596 chars</a:t>
+              <a:t>70,768 chars</a:t>
             </a:r>
           </a:p>
         </p:txBody>
@@ -4103,7 +4103,7 @@
                   <a:srgbClr val="5F6B7A"/>
                 </a:solidFill>
               </a:rPr>
-              <a:t>44 slides</a:t>
+              <a:t>46 slides</a:t>
             </a:r>
           </a:p>
         </p:txBody>
@@ -4136,7 +4136,7 @@
                   <a:srgbClr val="5F6B7A"/>
                 </a:solidFill>
               </a:rPr>
-              <a:t>1006 editable text frames</a:t>
+              <a:t>648 editable text frames</a:t>
             </a:r>
           </a:p>
         </p:txBody>
@@ -4169,7 +4169,7 @@
                   <a:srgbClr val="5F6B7A"/>
                 </a:solidFill>
               </a:rPr>
-              <a:t>1 tables, 0 charts</a:t>
+              <a:t>3 tables, 0 charts</a:t>
             </a:r>
           </a:p>
         </p:txBody>
@@ -4989,7 +4989,7 @@
                   <a:srgbClr val="5F6B7A"/>
                 </a:solidFill>
               </a:rPr>
-              <a:t>02. README.ko.md</a:t>
+              <a:t>02. docs/00-product-definition.md</a:t>
             </a:r>
           </a:p>
         </p:txBody>
@@ -5022,7 +5022,7 @@
                   <a:srgbClr val="5F6B7A"/>
                 </a:solidFill>
               </a:rPr>
-              <a:t>03. CODEX_PROMPT.md</a:t>
+              <a:t>03. docs/01-architecture.md</a:t>
             </a:r>
           </a:p>
         </p:txBody>
@@ -5055,7 +5055,7 @@
                   <a:srgbClr val="5F6B7A"/>
                 </a:solidFill>
               </a:rPr>
-              <a:t>04. docs/00-product-definition.md</a:t>
+              <a:t>04. docs/02-requirements.md</a:t>
             </a:r>
           </a:p>
         </p:txBody>
@@ -5088,7 +5088,7 @@
                   <a:srgbClr val="5F6B7A"/>
                 </a:solidFill>
               </a:rPr>
-              <a:t>05. docs/01-architecture.md</a:t>
+              <a:t>05. docs/03-page-splitting.md</a:t>
             </a:r>
           </a:p>
         </p:txBody>
@@ -5121,7 +5121,7 @@
                   <a:srgbClr val="5F6B7A"/>
                 </a:solidFill>
               </a:rPr>
-              <a:t>06. docs/02-requirements.md</a:t>
+              <a:t>06. docs/04-layout-rules.md</a:t>
             </a:r>
           </a:p>
         </p:txBody>
@@ -5154,7 +5154,7 @@
                   <a:srgbClr val="5F6B7A"/>
                 </a:solidFill>
               </a:rPr>
-              <a:t>07. docs/03-page-splitting.md</a:t>
+              <a:t>07. docs/05-overrides-for-llm.md</a:t>
             </a:r>
           </a:p>
         </p:txBody>
@@ -5187,7 +5187,7 @@
                   <a:srgbClr val="5F6B7A"/>
                 </a:solidFill>
               </a:rPr>
-              <a:t>08. docs/04-layout-rules.md</a:t>
+              <a:t>08. docs/06-cli-spec.md</a:t>
             </a:r>
           </a:p>
         </p:txBody>
@@ -5220,7 +5220,7 @@
                   <a:srgbClr val="5F6B7A"/>
                 </a:solidFill>
               </a:rPr>
-              <a:t>09. docs/05-overrides-for-llm.md</a:t>
+              <a:t>09. docs/07-rendering-rules.md</a:t>
             </a:r>
           </a:p>
         </p:txBody>
@@ -5253,7 +5253,7 @@
                   <a:srgbClr val="5F6B7A"/>
                 </a:solidFill>
               </a:rPr>
-              <a:t>10. docs/06-cli-spec.md</a:t>
+              <a:t>10. docs/08-roadmap.md</a:t>
             </a:r>
           </a:p>
         </p:txBody>
@@ -5286,7 +5286,7 @@
                   <a:srgbClr val="5F6B7A"/>
                 </a:solidFill>
               </a:rPr>
-              <a:t>11. docs/07-rendering-rules.md</a:t>
+              <a:t>11. docs/09-codex-implementation-guide.md</a:t>
             </a:r>
           </a:p>
         </p:txBody>
@@ -5319,7 +5319,7 @@
                   <a:srgbClr val="5F6B7A"/>
                 </a:solidFill>
               </a:rPr>
-              <a:t>12. docs/08-roadmap.md</a:t>
+              <a:t>12. docs/10-template-and-master-policy.md</a:t>
             </a:r>
           </a:p>
         </p:txBody>
@@ -5352,7 +5352,7 @@
                   <a:srgbClr val="5F6B7A"/>
                 </a:solidFill>
               </a:rPr>
-              <a:t>13. docs/09-codex-implementation-guide.md</a:t>
+              <a:t>13. docs/11-qa-overflow.md</a:t>
             </a:r>
           </a:p>
         </p:txBody>
@@ -5385,7 +5385,7 @@
                   <a:srgbClr val="5F6B7A"/>
                 </a:solidFill>
               </a:rPr>
-              <a:t>14. docs/10-template-and-master-policy.md</a:t>
+              <a:t>14. docs/references.md</a:t>
             </a:r>
           </a:p>
         </p:txBody>
@@ -5418,7 +5418,7 @@
                   <a:srgbClr val="5F6B7A"/>
                 </a:solidFill>
               </a:rPr>
-              <a:t>15. docs/11-qa-overflow.md</a:t>
+              <a:t>15. docs/adr/0001-presentation-ir-schema-contract.md</a:t>
             </a:r>
           </a:p>
         </p:txBody>
@@ -5451,7 +5451,7 @@
                   <a:srgbClr val="5F6B7A"/>
                 </a:solidFill>
               </a:rPr>
-              <a:t>16. docs/references.md</a:t>
+              <a:t>16. examples/basic/deck.md</a:t>
             </a:r>
           </a:p>
         </p:txBody>
@@ -5484,7 +5484,7 @@
                   <a:srgbClr val="5F6B7A"/>
                 </a:solidFill>
               </a:rPr>
-              <a:t>17. docs/adr/0001-presentation-ir-schema-contract.md</a:t>
+              <a:t>17. examples/comparison/deck.md</a:t>
             </a:r>
           </a:p>
         </p:txBody>
@@ -5517,7 +5517,7 @@
                   <a:srgbClr val="5F6B7A"/>
                 </a:solidFill>
               </a:rPr>
-              <a:t>18. examples/basic/deck.md</a:t>
+              <a:t>18. examples/pipeline/deck.md</a:t>
             </a:r>
           </a:p>
         </p:txBody>
@@ -6494,7 +6494,7 @@
                   <a:srgbClr val="5F6B7A"/>
                 </a:solidFill>
               </a:rPr>
-              <a:t>34,903 chars</a:t>
+              <a:t>47,619 chars</a:t>
             </a:r>
           </a:p>
         </p:txBody>
@@ -6737,7 +6737,7 @@
                   <a:srgbClr val="7C3AED"/>
                 </a:solidFill>
               </a:rPr>
-              <a:t>7</a:t>
+              <a:t>6</a:t>
             </a:r>
           </a:p>
         </p:txBody>
@@ -6803,7 +6803,7 @@
                   <a:srgbClr val="5F6B7A"/>
                 </a:solidFill>
               </a:rPr>
-              <a:t>4,134 chars</a:t>
+              <a:t>7,310 chars</a:t>
             </a:r>
           </a:p>
         </p:txBody>
@@ -7046,7 +7046,7 @@
                   <a:srgbClr val="0F766E"/>
                 </a:solidFill>
               </a:rPr>
-              <a:t>3</a:t>
+              <a:t>1</a:t>
             </a:r>
           </a:p>
         </p:txBody>
@@ -7112,7 +7112,7 @@
                   <a:srgbClr val="5F6B7A"/>
                 </a:solidFill>
               </a:rPr>
-              <a:t>15,333 chars</a:t>
+              <a:t>14,613 chars</a:t>
             </a:r>
           </a:p>
         </p:txBody>
@@ -7152,73 +7152,7 @@
       </p:sp>
       <p:sp>
         <p:nvSpPr>
-          <p:cNvPr id="30" name="group_2_item_1"/>
-          <p:cNvSpPr txBox="1"/>
-          <p:nvPr/>
-        </p:nvSpPr>
-        <p:spPr>
-          <a:xfrm>
-            <a:off x="6455664" y="3319272"/>
-            <a:ext cx="1901952" cy="201168"/>
-          </a:xfrm>
-          <a:prstGeom prst="rect">
-            <a:avLst/>
-          </a:prstGeom>
-          <a:noFill/>
-        </p:spPr>
-        <p:txBody>
-          <a:bodyPr wrap="square" anchor="ctr" lIns="0" rIns="0" tIns="0" bIns="0">
-            <a:spAutoFit/>
-          </a:bodyPr>
-          <a:lstStyle/>
-          <a:p>
-            <a:r>
-              <a:rPr sz="800" b="0">
-                <a:solidFill>
-                  <a:srgbClr val="5F6B7A"/>
-                </a:solidFill>
-              </a:rPr>
-              <a:t>README.ko.md</a:t>
-            </a:r>
-          </a:p>
-        </p:txBody>
-      </p:sp>
-      <p:sp>
-        <p:nvSpPr>
-          <p:cNvPr id="31" name="group_2_item_2"/>
-          <p:cNvSpPr txBox="1"/>
-          <p:nvPr/>
-        </p:nvSpPr>
-        <p:spPr>
-          <a:xfrm>
-            <a:off x="6455664" y="3602736"/>
-            <a:ext cx="1901952" cy="201168"/>
-          </a:xfrm>
-          <a:prstGeom prst="rect">
-            <a:avLst/>
-          </a:prstGeom>
-          <a:noFill/>
-        </p:spPr>
-        <p:txBody>
-          <a:bodyPr wrap="square" anchor="ctr" lIns="0" rIns="0" tIns="0" bIns="0">
-            <a:spAutoFit/>
-          </a:bodyPr>
-          <a:lstStyle/>
-          <a:p>
-            <a:r>
-              <a:rPr sz="800" b="0">
-                <a:solidFill>
-                  <a:srgbClr val="5F6B7A"/>
-                </a:solidFill>
-              </a:rPr>
-              <a:t>CODEX_PROMPT.md</a:t>
-            </a:r>
-          </a:p>
-        </p:txBody>
-      </p:sp>
-      <p:sp>
-        <p:nvSpPr>
-          <p:cNvPr id="32" name="group_3_card"/>
+          <p:cNvPr id="30" name="group_3_card"/>
           <p:cNvSpPr/>
           <p:nvPr/>
         </p:nvSpPr>
@@ -7263,7 +7197,7 @@
       </p:sp>
       <p:sp>
         <p:nvSpPr>
-          <p:cNvPr id="33" name="group_3_num"/>
+          <p:cNvPr id="31" name="group_3_num"/>
           <p:cNvSpPr txBox="1"/>
           <p:nvPr/>
         </p:nvSpPr>
@@ -7296,7 +7230,7 @@
       </p:sp>
       <p:sp>
         <p:nvSpPr>
-          <p:cNvPr id="34" name="group_3_label"/>
+          <p:cNvPr id="32" name="group_3_label"/>
           <p:cNvSpPr txBox="1"/>
           <p:nvPr/>
         </p:nvSpPr>
@@ -7329,7 +7263,7 @@
       </p:sp>
       <p:sp>
         <p:nvSpPr>
-          <p:cNvPr id="35" name="group_3_chars"/>
+          <p:cNvPr id="33" name="group_3_chars"/>
           <p:cNvSpPr txBox="1"/>
           <p:nvPr/>
         </p:nvSpPr>
@@ -7362,7 +7296,7 @@
       </p:sp>
       <p:sp>
         <p:nvSpPr>
-          <p:cNvPr id="36" name="group_3_item_0"/>
+          <p:cNvPr id="34" name="group_3_item_0"/>
           <p:cNvSpPr txBox="1"/>
           <p:nvPr/>
         </p:nvSpPr>
@@ -7395,7 +7329,7 @@
       </p:sp>
       <p:sp>
         <p:nvSpPr>
-          <p:cNvPr id="37" name="coverage_band"/>
+          <p:cNvPr id="35" name="coverage_band"/>
           <p:cNvSpPr/>
           <p:nvPr/>
         </p:nvSpPr>
@@ -7440,7 +7374,7 @@
       </p:sp>
       <p:sp>
         <p:nvSpPr>
-          <p:cNvPr id="38" name="coverage_note"/>
+          <p:cNvPr id="36" name="coverage_note"/>
           <p:cNvSpPr txBox="1"/>
           <p:nvPr/>
         </p:nvSpPr>
@@ -7466,7 +7400,7 @@
                   <a:srgbClr val="111827"/>
                 </a:solidFill>
               </a:rPr>
-              <a:t>Total: 24 Markdown files, 194 headings, 55,596 source characters.</a:t>
+              <a:t>Total: 21 Markdown files, 180 headings, 70,768 source characters.</a:t>
             </a:r>
           </a:p>
         </p:txBody>
@@ -13422,7 +13356,7 @@
                   <a:srgbClr val="5F6B7A"/>
                 </a:solidFill>
               </a:rPr>
-              <a:t>AI 업무 자동화 제안서</a:t>
+              <a:t>AI Workflow Automation Proposal</a:t>
             </a:r>
           </a:p>
         </p:txBody>
@@ -13455,7 +13389,7 @@
                   <a:srgbClr val="5F6B7A"/>
                 </a:solidFill>
               </a:rPr>
-              <a:t>문제 정의</a:t>
+              <a:t>Problem Definition</a:t>
             </a:r>
           </a:p>
         </p:txBody>
@@ -13746,7 +13680,7 @@
                   <a:srgbClr val="5F6B7A"/>
                 </a:solidFill>
               </a:rPr>
-              <a:t>비교 구조 예시</a:t>
+              <a:t>Comparison Structure Example</a:t>
             </a:r>
           </a:p>
         </p:txBody>
@@ -13779,7 +13713,7 @@
                   <a:srgbClr val="5F6B7A"/>
                 </a:solidFill>
               </a:rPr>
-              <a:t>기존 방식과 개선 방식</a:t>
+              <a:t>Current Approach and Improved Approach</a:t>
             </a:r>
           </a:p>
         </p:txBody>
@@ -14718,7 +14652,7 @@
                   <a:srgbClr val="5F6B7A"/>
                 </a:solidFill>
               </a:rPr>
-              <a:t>5개 항목 레이아웃 예시</a:t>
+              <a:t>Five-Item Layout Example</a:t>
             </a:r>
           </a:p>
         </p:txBody>
@@ -14751,7 +14685,7 @@
                   <a:srgbClr val="5F6B7A"/>
                 </a:solidFill>
               </a:rPr>
-              <a:t>5가지 실행 방법</a:t>
+              <a:t>Five Execution Steps</a:t>
             </a:r>
           </a:p>
         </p:txBody>
@@ -15042,7 +14976,7 @@
                   <a:srgbClr val="5F6B7A"/>
                 </a:solidFill>
               </a:rPr>
-              <a:t>mdpresent</a:t>
+              <a:t>MDPR Design Grammar</a:t>
             </a:r>
           </a:p>
         </p:txBody>
@@ -15075,7 +15009,7 @@
                   <a:srgbClr val="5F6B7A"/>
                 </a:solidFill>
               </a:rPr>
-              <a:t>Core Principle</a:t>
+              <a:t>Teaser Summary</a:t>
             </a:r>
           </a:p>
         </p:txBody>
@@ -15470,7 +15404,7 @@
                             <a:srgbClr val="111827"/>
                           </a:solidFill>
                         </a:rPr>
-                        <a:t>128</a:t>
+                        <a:t>126</a:t>
                       </a:r>
                     </a:p>
                   </a:txBody>
@@ -15491,7 +15425,7 @@
                             <a:srgbClr val="111827"/>
                           </a:solidFill>
                         </a:rPr>
-                        <a:t>36,129</a:t>
+                        <a:t>48,845</a:t>
                       </a:r>
                     </a:p>
                   </a:txBody>
@@ -15535,7 +15469,7 @@
                             <a:srgbClr val="111827"/>
                           </a:solidFill>
                         </a:rPr>
-                        <a:t>7</a:t>
+                        <a:t>6</a:t>
                       </a:r>
                     </a:p>
                   </a:txBody>
@@ -15556,7 +15490,7 @@
                             <a:srgbClr val="111827"/>
                           </a:solidFill>
                         </a:rPr>
-                        <a:t>39</a:t>
+                        <a:t>41</a:t>
                       </a:r>
                     </a:p>
                   </a:txBody>
@@ -15577,7 +15511,7 @@
                             <a:srgbClr val="111827"/>
                           </a:solidFill>
                         </a:rPr>
-                        <a:t>4,134</a:t>
+                        <a:t>7,310</a:t>
                       </a:r>
                     </a:p>
                   </a:txBody>
@@ -15621,7 +15555,7 @@
                             <a:srgbClr val="111827"/>
                           </a:solidFill>
                         </a:rPr>
-                        <a:t>3</a:t>
+                        <a:t>1</a:t>
                       </a:r>
                     </a:p>
                   </a:txBody>
@@ -15642,7 +15576,7 @@
                             <a:srgbClr val="111827"/>
                           </a:solidFill>
                         </a:rPr>
-                        <a:t>27</a:t>
+                        <a:t>13</a:t>
                       </a:r>
                     </a:p>
                   </a:txBody>
@@ -15663,7 +15597,7 @@
                             <a:srgbClr val="111827"/>
                           </a:solidFill>
                         </a:rPr>
-                        <a:t>15,333</a:t>
+                        <a:t>14,613</a:t>
                       </a:r>
                     </a:p>
                   </a:txBody>

--- a/artifacts/mdpr-vs-skill/mdpr-skill-from-actual-md-run.pptx
+++ b/artifacts/mdpr-vs-skill/mdpr-skill-from-actual-md-run.pptx
@@ -3767,7 +3767,7 @@
                   <a:srgbClr val="5F6B7A"/>
                 </a:solidFill>
               </a:rPr>
-              <a:t>70,768 chars</a:t>
+              <a:t>73,034 chars</a:t>
             </a:r>
           </a:p>
         </p:txBody>
@@ -6494,7 +6494,7 @@
                   <a:srgbClr val="5F6B7A"/>
                 </a:solidFill>
               </a:rPr>
-              <a:t>47,619 chars</a:t>
+              <a:t>49,481 chars</a:t>
             </a:r>
           </a:p>
         </p:txBody>
@@ -7112,7 +7112,7 @@
                   <a:srgbClr val="5F6B7A"/>
                 </a:solidFill>
               </a:rPr>
-              <a:t>14,613 chars</a:t>
+              <a:t>15,017 chars</a:t>
             </a:r>
           </a:p>
         </p:txBody>
@@ -7400,7 +7400,7 @@
                   <a:srgbClr val="111827"/>
                 </a:solidFill>
               </a:rPr>
-              <a:t>Total: 21 Markdown files, 180 headings, 70,768 source characters.</a:t>
+              <a:t>Total: 21 Markdown files, 180 headings, 73,034 source characters.</a:t>
             </a:r>
           </a:p>
         </p:txBody>
@@ -15425,7 +15425,7 @@
                             <a:srgbClr val="111827"/>
                           </a:solidFill>
                         </a:rPr>
-                        <a:t>48,845</a:t>
+                        <a:t>50,707</a:t>
                       </a:r>
                     </a:p>
                   </a:txBody>
@@ -15597,7 +15597,7 @@
                             <a:srgbClr val="111827"/>
                           </a:solidFill>
                         </a:rPr>
-                        <a:t>14,613</a:t>
+                        <a:t>15,017</a:t>
                       </a:r>
                     </a:p>
                   </a:txBody>

--- a/artifacts/mdpr-vs-skill/mdpr-skill-from-actual-md-run.pptx
+++ b/artifacts/mdpr-vs-skill/mdpr-skill-from-actual-md-run.pptx
@@ -6872,8 +6872,8 @@
         </p:nvSpPr>
         <p:spPr>
           <a:xfrm>
-            <a:off x="749808" y="3858768"/>
-            <a:ext cx="4892040" cy="1664208"/>
+            <a:off x="749808" y="3730752"/>
+            <a:ext cx="4892040" cy="1874519"/>
           </a:xfrm>
           <a:prstGeom prst="roundRect">
             <a:avLst/>
@@ -6917,7 +6917,7 @@
         </p:nvSpPr>
         <p:spPr>
           <a:xfrm>
-            <a:off x="914400" y="4023359"/>
+            <a:off x="914400" y="3895344"/>
             <a:ext cx="285292" cy="368503"/>
           </a:xfrm>
           <a:prstGeom prst="roundRect">
@@ -6962,7 +6962,7 @@
         </p:nvSpPr>
         <p:spPr>
           <a:xfrm>
-            <a:off x="985723" y="4118457"/>
+            <a:off x="985723" y="3990441"/>
             <a:ext cx="148590" cy="20802"/>
           </a:xfrm>
           <a:prstGeom prst="rect">
@@ -7007,7 +7007,7 @@
         </p:nvSpPr>
         <p:spPr>
           <a:xfrm>
-            <a:off x="985723" y="4195724"/>
+            <a:off x="985723" y="4067708"/>
             <a:ext cx="148590" cy="20802"/>
           </a:xfrm>
           <a:prstGeom prst="rect">
@@ -7052,7 +7052,7 @@
         </p:nvSpPr>
         <p:spPr>
           <a:xfrm>
-            <a:off x="985723" y="4272991"/>
+            <a:off x="985723" y="4144975"/>
             <a:ext cx="148590" cy="20802"/>
           </a:xfrm>
           <a:prstGeom prst="rect">
@@ -7097,7 +7097,7 @@
         </p:nvSpPr>
         <p:spPr>
           <a:xfrm>
-            <a:off x="1554480" y="4041648"/>
+            <a:off x="1554480" y="3913632"/>
             <a:ext cx="3904487" cy="347472"/>
           </a:xfrm>
           <a:prstGeom prst="rect">
@@ -7130,7 +7130,7 @@
         </p:nvSpPr>
         <p:spPr>
           <a:xfrm>
-            <a:off x="1554480" y="4498848"/>
+            <a:off x="1554480" y="4370832"/>
             <a:ext cx="3904487" cy="310896"/>
           </a:xfrm>
           <a:prstGeom prst="rect">
@@ -7163,7 +7163,7 @@
         </p:nvSpPr>
         <p:spPr>
           <a:xfrm>
-            <a:off x="1554480" y="4882896"/>
+            <a:off x="1554480" y="4754880"/>
             <a:ext cx="3904487" cy="310896"/>
           </a:xfrm>
           <a:prstGeom prst="rect">
@@ -7196,7 +7196,7 @@
         </p:nvSpPr>
         <p:spPr>
           <a:xfrm>
-            <a:off x="1554480" y="5266944"/>
+            <a:off x="1554480" y="5138928"/>
             <a:ext cx="3904487" cy="310896"/>
           </a:xfrm>
           <a:prstGeom prst="rect">
@@ -7229,8 +7229,8 @@
         </p:nvSpPr>
         <p:spPr>
           <a:xfrm>
-            <a:off x="6144768" y="3858768"/>
-            <a:ext cx="4892040" cy="1664208"/>
+            <a:off x="6144768" y="3730752"/>
+            <a:ext cx="4892040" cy="1874519"/>
           </a:xfrm>
           <a:prstGeom prst="roundRect">
             <a:avLst/>
@@ -7274,7 +7274,7 @@
         </p:nvSpPr>
         <p:spPr>
           <a:xfrm>
-            <a:off x="6452006" y="4023359"/>
+            <a:off x="6452006" y="3895344"/>
             <a:ext cx="35661" cy="344728"/>
           </a:xfrm>
           <a:prstGeom prst="rect">
@@ -7319,7 +7319,7 @@
         </p:nvSpPr>
         <p:spPr>
           <a:xfrm>
-            <a:off x="6309359" y="4166006"/>
+            <a:off x="6309359" y="4037990"/>
             <a:ext cx="344728" cy="35661"/>
           </a:xfrm>
           <a:prstGeom prst="rect">
@@ -7364,7 +7364,7 @@
         </p:nvSpPr>
         <p:spPr>
           <a:xfrm>
-            <a:off x="6570878" y="4284878"/>
+            <a:off x="6570878" y="4156862"/>
             <a:ext cx="59436" cy="59436"/>
           </a:xfrm>
           <a:prstGeom prst="ellipse">
@@ -7409,7 +7409,7 @@
         </p:nvSpPr>
         <p:spPr>
           <a:xfrm>
-            <a:off x="6949440" y="4041648"/>
+            <a:off x="6949440" y="3913632"/>
             <a:ext cx="3904487" cy="347472"/>
           </a:xfrm>
           <a:prstGeom prst="rect">
@@ -7442,7 +7442,7 @@
         </p:nvSpPr>
         <p:spPr>
           <a:xfrm>
-            <a:off x="6949440" y="4498848"/>
+            <a:off x="6949440" y="4370832"/>
             <a:ext cx="3904487" cy="310896"/>
           </a:xfrm>
           <a:prstGeom prst="rect">
@@ -7475,7 +7475,7 @@
         </p:nvSpPr>
         <p:spPr>
           <a:xfrm>
-            <a:off x="6949440" y="4882896"/>
+            <a:off x="6949440" y="4754880"/>
             <a:ext cx="3904487" cy="310896"/>
           </a:xfrm>
           <a:prstGeom prst="rect">
@@ -7508,7 +7508,7 @@
         </p:nvSpPr>
         <p:spPr>
           <a:xfrm>
-            <a:off x="6949440" y="5266944"/>
+            <a:off x="6949440" y="5138928"/>
             <a:ext cx="3904487" cy="310896"/>
           </a:xfrm>
           <a:prstGeom prst="rect">
@@ -13570,31 +13570,64 @@
                   <a:srgbClr val="111827"/>
                 </a:solidFill>
               </a:rPr>
-              <a:t>Visual suggestions remain optional and semantic</a:t>
-            </a:r>
-          </a:p>
-        </p:txBody>
-      </p:sp>
-      <p:sp>
-        <p:nvSpPr>
-          <p:cNvPr id="4" name="body_panel"/>
+              <a:t>Suggestions stop before geometry</a:t>
+            </a:r>
+          </a:p>
+        </p:txBody>
+      </p:sp>
+      <p:sp>
+        <p:nvSpPr>
+          <p:cNvPr id="4" name="suggestion_heading"/>
+          <p:cNvSpPr txBox="1"/>
+          <p:nvPr/>
+        </p:nvSpPr>
+        <p:spPr>
+          <a:xfrm>
+            <a:off x="804672" y="1417320"/>
+            <a:ext cx="4800600" cy="411480"/>
+          </a:xfrm>
+          <a:prstGeom prst="rect">
+            <a:avLst/>
+          </a:prstGeom>
+          <a:noFill/>
+        </p:spPr>
+        <p:txBody>
+          <a:bodyPr wrap="square" anchor="ctr" lIns="0" rIns="0" tIns="0" bIns="0">
+            <a:spAutoFit/>
+          </a:bodyPr>
+          <a:lstStyle/>
+          <a:p>
+            <a:r>
+              <a:rPr sz="2000" b="1">
+                <a:solidFill>
+                  <a:srgbClr val="0F766E"/>
+                </a:solidFill>
+              </a:rPr>
+              <a:t>mdpr-skill may suggest</a:t>
+            </a:r>
+          </a:p>
+        </p:txBody>
+      </p:sp>
+      <p:sp>
+        <p:nvSpPr>
+          <p:cNvPr id="5" name="suggestion_0_mark"/>
           <p:cNvSpPr/>
           <p:nvPr/>
         </p:nvSpPr>
         <p:spPr>
           <a:xfrm>
-            <a:off x="822960" y="1536192"/>
-            <a:ext cx="6400800" cy="3401568"/>
-          </a:xfrm>
-          <a:prstGeom prst="roundRect">
-            <a:avLst/>
-          </a:prstGeom>
-          <a:solidFill>
-            <a:srgbClr val="FFFDF8"/>
+            <a:off x="822960" y="2103120"/>
+            <a:ext cx="164592" cy="530352"/>
+          </a:xfrm>
+          <a:prstGeom prst="rect">
+            <a:avLst/>
+          </a:prstGeom>
+          <a:solidFill>
+            <a:srgbClr val="0F766E"/>
           </a:solidFill>
           <a:ln>
             <a:solidFill>
-              <a:srgbClr val="D7CDBD"/>
+              <a:srgbClr val="0F766E"/>
             </a:solidFill>
           </a:ln>
         </p:spPr>
@@ -13622,14 +13655,14 @@
       </p:sp>
       <p:sp>
         <p:nvSpPr>
-          <p:cNvPr id="5" name="body_heading"/>
+          <p:cNvPr id="6" name="suggestion_0_label"/>
           <p:cNvSpPr txBox="1"/>
           <p:nvPr/>
         </p:nvSpPr>
         <p:spPr>
           <a:xfrm>
-            <a:off x="1115568" y="1828800"/>
-            <a:ext cx="5303520" cy="310896"/>
+            <a:off x="1170432" y="2057400"/>
+            <a:ext cx="1143000" cy="274320"/>
           </a:xfrm>
           <a:prstGeom prst="rect">
             <a:avLst/>
@@ -13643,26 +13676,26 @@
           <a:lstStyle/>
           <a:p>
             <a:r>
-              <a:rPr sz="1800" b="1">
+              <a:rPr sz="1600" b="1">
                 <a:solidFill>
                   <a:srgbClr val="111827"/>
                 </a:solidFill>
               </a:rPr>
-              <a:t>Current skill behavior</a:t>
-            </a:r>
-          </a:p>
-        </p:txBody>
-      </p:sp>
-      <p:sp>
-        <p:nvSpPr>
-          <p:cNvPr id="6" name="icon_bullet_0"/>
+              <a:t>PLACEMENT</a:t>
+            </a:r>
+          </a:p>
+        </p:txBody>
+      </p:sp>
+      <p:sp>
+        <p:nvSpPr>
+          <p:cNvPr id="7" name="suggestion_0_body"/>
           <p:cNvSpPr txBox="1"/>
           <p:nvPr/>
         </p:nvSpPr>
         <p:spPr>
           <a:xfrm>
-            <a:off x="1170432" y="2331720"/>
-            <a:ext cx="5303520" cy="329184"/>
+            <a:off x="2359152" y="2039112"/>
+            <a:ext cx="3246120" cy="621792"/>
           </a:xfrm>
           <a:prstGeom prst="rect">
             <a:avLst/>
@@ -13681,163 +13714,31 @@
                   <a:srgbClr val="5F6B7A"/>
                 </a:solidFill>
               </a:rPr>
-              <a:t>- Reserve an aside/corner region, not a primary region.</a:t>
-            </a:r>
-          </a:p>
-        </p:txBody>
-      </p:sp>
-      <p:sp>
-        <p:nvSpPr>
-          <p:cNvPr id="7" name="icon_bullet_1"/>
-          <p:cNvSpPr txBox="1"/>
-          <p:nvPr/>
-        </p:nvSpPr>
-        <p:spPr>
-          <a:xfrm>
-            <a:off x="1170432" y="2770632"/>
-            <a:ext cx="5303520" cy="329184"/>
-          </a:xfrm>
-          <a:prstGeom prst="rect">
-            <a:avLst/>
-          </a:prstGeom>
-          <a:noFill/>
-        </p:spPr>
-        <p:txBody>
-          <a:bodyPr wrap="square" anchor="ctr" lIns="0" rIns="0" tIns="0" bIns="0">
-            <a:spAutoFit/>
-          </a:bodyPr>
-          <a:lstStyle/>
-          <a:p>
-            <a:r>
-              <a:rPr sz="1600" b="0">
-                <a:solidFill>
-                  <a:srgbClr val="5F6B7A"/>
-                </a:solidFill>
-              </a:rPr>
-              <a:t>- Use one black or white icon.</a:t>
-            </a:r>
-          </a:p>
-        </p:txBody>
-      </p:sp>
-      <p:sp>
-        <p:nvSpPr>
-          <p:cNvPr id="8" name="icon_bullet_2"/>
-          <p:cNvSpPr txBox="1"/>
-          <p:nvPr/>
-        </p:nvSpPr>
-        <p:spPr>
-          <a:xfrm>
-            <a:off x="1170432" y="3209544"/>
-            <a:ext cx="5303520" cy="329184"/>
-          </a:xfrm>
-          <a:prstGeom prst="rect">
-            <a:avLst/>
-          </a:prstGeom>
-          <a:noFill/>
-        </p:spPr>
-        <p:txBody>
-          <a:bodyPr wrap="square" anchor="ctr" lIns="0" rIns="0" tIns="0" bIns="0">
-            <a:spAutoFit/>
-          </a:bodyPr>
-          <a:lstStyle/>
-          <a:p>
-            <a:r>
-              <a:rPr sz="1600" b="0">
-                <a:solidFill>
-                  <a:srgbClr val="5F6B7A"/>
-                </a:solidFill>
-              </a:rPr>
-              <a:t>- Prefer PowerPoint built-in icons.</a:t>
-            </a:r>
-          </a:p>
-        </p:txBody>
-      </p:sp>
-      <p:sp>
-        <p:nvSpPr>
-          <p:cNvPr id="9" name="icon_bullet_3"/>
-          <p:cNvSpPr txBox="1"/>
-          <p:nvPr/>
-        </p:nvSpPr>
-        <p:spPr>
-          <a:xfrm>
-            <a:off x="1170432" y="3648456"/>
-            <a:ext cx="5303520" cy="329184"/>
-          </a:xfrm>
-          <a:prstGeom prst="rect">
-            <a:avLst/>
-          </a:prstGeom>
-          <a:noFill/>
-        </p:spPr>
-        <p:txBody>
-          <a:bodyPr wrap="square" anchor="ctr" lIns="0" rIns="0" tIns="0" bIns="0">
-            <a:spAutoFit/>
-          </a:bodyPr>
-          <a:lstStyle/>
-          <a:p>
-            <a:r>
-              <a:rPr sz="1600" b="0">
-                <a:solidFill>
-                  <a:srgbClr val="5F6B7A"/>
-                </a:solidFill>
-              </a:rPr>
-              <a:t>- Allow free SVG only with license record.</a:t>
-            </a:r>
-          </a:p>
-        </p:txBody>
-      </p:sp>
-      <p:sp>
-        <p:nvSpPr>
-          <p:cNvPr id="10" name="icon_bullet_4"/>
-          <p:cNvSpPr txBox="1"/>
-          <p:nvPr/>
-        </p:nvSpPr>
-        <p:spPr>
-          <a:xfrm>
-            <a:off x="1170432" y="4087368"/>
-            <a:ext cx="5303520" cy="329184"/>
-          </a:xfrm>
-          <a:prstGeom prst="rect">
-            <a:avLst/>
-          </a:prstGeom>
-          <a:noFill/>
-        </p:spPr>
-        <p:txBody>
-          <a:bodyPr wrap="square" anchor="ctr" lIns="0" rIns="0" tIns="0" bIns="0">
-            <a:spAutoFit/>
-          </a:bodyPr>
-          <a:lstStyle/>
-          <a:p>
-            <a:r>
-              <a:rPr sz="1600" b="0">
-                <a:solidFill>
-                  <a:srgbClr val="5F6B7A"/>
-                </a:solidFill>
-              </a:rPr>
-              <a:t>- Validate icon center against text midpoint.</a:t>
-            </a:r>
-          </a:p>
-        </p:txBody>
-      </p:sp>
-      <p:sp>
-        <p:nvSpPr>
-          <p:cNvPr id="11" name="icon_slot"/>
+              <a:t>Reserve an aside or corner region.</a:t>
+            </a:r>
+          </a:p>
+        </p:txBody>
+      </p:sp>
+      <p:sp>
+        <p:nvSpPr>
+          <p:cNvPr id="8" name="suggestion_1_mark"/>
           <p:cNvSpPr/>
           <p:nvPr/>
         </p:nvSpPr>
         <p:spPr>
           <a:xfrm>
-            <a:off x="7818120" y="1965960"/>
-            <a:ext cx="2212848" cy="2212848"/>
-          </a:xfrm>
-          <a:prstGeom prst="roundRect">
-            <a:avLst/>
-          </a:prstGeom>
-          <a:solidFill>
-            <a:srgbClr val="EAF7F3"/>
+            <a:off x="822960" y="3182111"/>
+            <a:ext cx="164592" cy="530352"/>
+          </a:xfrm>
+          <a:prstGeom prst="rect">
+            <a:avLst/>
+          </a:prstGeom>
+          <a:solidFill>
+            <a:srgbClr val="0F766E"/>
           </a:solidFill>
           <a:ln>
             <a:solidFill>
-              <a:srgbClr val="D7CDBD"/>
+              <a:srgbClr val="0F766E"/>
             </a:solidFill>
           </a:ln>
         </p:spPr>
@@ -13865,24 +13766,90 @@
       </p:sp>
       <p:sp>
         <p:nvSpPr>
-          <p:cNvPr id="12" name="aside_icon_v"/>
+          <p:cNvPr id="9" name="suggestion_1_label"/>
+          <p:cNvSpPr txBox="1"/>
+          <p:nvPr/>
+        </p:nvSpPr>
+        <p:spPr>
+          <a:xfrm>
+            <a:off x="1170432" y="3136391"/>
+            <a:ext cx="1143000" cy="274320"/>
+          </a:xfrm>
+          <a:prstGeom prst="rect">
+            <a:avLst/>
+          </a:prstGeom>
+          <a:noFill/>
+        </p:spPr>
+        <p:txBody>
+          <a:bodyPr wrap="square" anchor="ctr" lIns="0" rIns="0" tIns="0" bIns="0">
+            <a:spAutoFit/>
+          </a:bodyPr>
+          <a:lstStyle/>
+          <a:p>
+            <a:r>
+              <a:rPr sz="1600" b="1">
+                <a:solidFill>
+                  <a:srgbClr val="111827"/>
+                </a:solidFill>
+              </a:rPr>
+              <a:t>SOURCE</a:t>
+            </a:r>
+          </a:p>
+        </p:txBody>
+      </p:sp>
+      <p:sp>
+        <p:nvSpPr>
+          <p:cNvPr id="10" name="suggestion_1_body"/>
+          <p:cNvSpPr txBox="1"/>
+          <p:nvPr/>
+        </p:nvSpPr>
+        <p:spPr>
+          <a:xfrm>
+            <a:off x="2359152" y="3118103"/>
+            <a:ext cx="3246120" cy="621792"/>
+          </a:xfrm>
+          <a:prstGeom prst="rect">
+            <a:avLst/>
+          </a:prstGeom>
+          <a:noFill/>
+        </p:spPr>
+        <p:txBody>
+          <a:bodyPr wrap="square" anchor="ctr" lIns="0" rIns="0" tIns="0" bIns="0">
+            <a:spAutoFit/>
+          </a:bodyPr>
+          <a:lstStyle/>
+          <a:p>
+            <a:r>
+              <a:rPr sz="1600" b="0">
+                <a:solidFill>
+                  <a:srgbClr val="5F6B7A"/>
+                </a:solidFill>
+              </a:rPr>
+              <a:t>Use one licensed monochrome icon.</a:t>
+            </a:r>
+          </a:p>
+        </p:txBody>
+      </p:sp>
+      <p:sp>
+        <p:nvSpPr>
+          <p:cNvPr id="11" name="suggestion_2_mark"/>
           <p:cNvSpPr/>
           <p:nvPr/>
         </p:nvSpPr>
         <p:spPr>
           <a:xfrm>
-            <a:off x="8745321" y="2487168"/>
-            <a:ext cx="87782" cy="848563"/>
-          </a:xfrm>
-          <a:prstGeom prst="rect">
-            <a:avLst/>
-          </a:prstGeom>
-          <a:solidFill>
-            <a:srgbClr val="111827"/>
+            <a:off x="822960" y="4261103"/>
+            <a:ext cx="164592" cy="530352"/>
+          </a:xfrm>
+          <a:prstGeom prst="rect">
+            <a:avLst/>
+          </a:prstGeom>
+          <a:solidFill>
+            <a:srgbClr val="0F766E"/>
           </a:solidFill>
           <a:ln>
             <a:solidFill>
-              <a:srgbClr val="111827"/>
+              <a:srgbClr val="0F766E"/>
             </a:solidFill>
           </a:ln>
         </p:spPr>
@@ -13910,24 +13877,90 @@
       </p:sp>
       <p:sp>
         <p:nvSpPr>
-          <p:cNvPr id="13" name="aside_icon_h"/>
+          <p:cNvPr id="12" name="suggestion_2_label"/>
+          <p:cNvSpPr txBox="1"/>
+          <p:nvPr/>
+        </p:nvSpPr>
+        <p:spPr>
+          <a:xfrm>
+            <a:off x="1170432" y="4215383"/>
+            <a:ext cx="1143000" cy="274320"/>
+          </a:xfrm>
+          <a:prstGeom prst="rect">
+            <a:avLst/>
+          </a:prstGeom>
+          <a:noFill/>
+        </p:spPr>
+        <p:txBody>
+          <a:bodyPr wrap="square" anchor="ctr" lIns="0" rIns="0" tIns="0" bIns="0">
+            <a:spAutoFit/>
+          </a:bodyPr>
+          <a:lstStyle/>
+          <a:p>
+            <a:r>
+              <a:rPr sz="1600" b="1">
+                <a:solidFill>
+                  <a:srgbClr val="111827"/>
+                </a:solidFill>
+              </a:rPr>
+              <a:t>CHECK</a:t>
+            </a:r>
+          </a:p>
+        </p:txBody>
+      </p:sp>
+      <p:sp>
+        <p:nvSpPr>
+          <p:cNvPr id="13" name="suggestion_2_body"/>
+          <p:cNvSpPr txBox="1"/>
+          <p:nvPr/>
+        </p:nvSpPr>
+        <p:spPr>
+          <a:xfrm>
+            <a:off x="2359152" y="4197096"/>
+            <a:ext cx="3246120" cy="621792"/>
+          </a:xfrm>
+          <a:prstGeom prst="rect">
+            <a:avLst/>
+          </a:prstGeom>
+          <a:noFill/>
+        </p:spPr>
+        <p:txBody>
+          <a:bodyPr wrap="square" anchor="ctr" lIns="0" rIns="0" tIns="0" bIns="0">
+            <a:spAutoFit/>
+          </a:bodyPr>
+          <a:lstStyle/>
+          <a:p>
+            <a:r>
+              <a:rPr sz="1600" b="0">
+                <a:solidFill>
+                  <a:srgbClr val="5F6B7A"/>
+                </a:solidFill>
+              </a:rPr>
+              <a:t>Compare visual center with the text midpoint.</a:t>
+            </a:r>
+          </a:p>
+        </p:txBody>
+      </p:sp>
+      <p:sp>
+        <p:nvSpPr>
+          <p:cNvPr id="14" name="runtime_field"/>
           <p:cNvSpPr/>
           <p:nvPr/>
         </p:nvSpPr>
         <p:spPr>
           <a:xfrm>
-            <a:off x="8394192" y="2838297"/>
-            <a:ext cx="848563" cy="87782"/>
-          </a:xfrm>
-          <a:prstGeom prst="rect">
-            <a:avLst/>
-          </a:prstGeom>
-          <a:solidFill>
-            <a:srgbClr val="111827"/>
+            <a:off x="6144768" y="1298448"/>
+            <a:ext cx="5394960" cy="4526280"/>
+          </a:xfrm>
+          <a:prstGeom prst="rect">
+            <a:avLst/>
+          </a:prstGeom>
+          <a:solidFill>
+            <a:srgbClr val="EAF7F3"/>
           </a:solidFill>
           <a:ln>
             <a:solidFill>
-              <a:srgbClr val="111827"/>
+              <a:srgbClr val="EAF7F3"/>
             </a:solidFill>
           </a:ln>
         </p:spPr>
@@ -13955,46 +13988,331 @@
       </p:sp>
       <p:sp>
         <p:nvSpPr>
-          <p:cNvPr id="14" name="aside_icon_dot"/>
-          <p:cNvSpPr/>
-          <p:nvPr/>
-        </p:nvSpPr>
-        <p:spPr>
-          <a:xfrm>
-            <a:off x="9037929" y="3130905"/>
-            <a:ext cx="146304" cy="146304"/>
-          </a:xfrm>
-          <a:prstGeom prst="ellipse">
-            <a:avLst/>
-          </a:prstGeom>
-          <a:solidFill>
-            <a:srgbClr val="111827"/>
-          </a:solidFill>
-          <a:ln>
-            <a:solidFill>
-              <a:srgbClr val="111827"/>
-            </a:solidFill>
-          </a:ln>
-        </p:spPr>
-        <p:style>
-          <a:lnRef idx="1">
-            <a:schemeClr val="accent1"/>
-          </a:lnRef>
-          <a:fillRef idx="3">
-            <a:schemeClr val="accent1"/>
-          </a:fillRef>
-          <a:effectRef idx="2">
-            <a:schemeClr val="accent1"/>
-          </a:effectRef>
-          <a:fontRef idx="minor">
-            <a:schemeClr val="lt1"/>
-          </a:fontRef>
-        </p:style>
-        <p:txBody>
-          <a:bodyPr rtlCol="0" anchor="ctr"/>
-          <a:lstStyle/>
-          <a:p>
-            <a:pPr algn="ctr"/>
+          <p:cNvPr id="15" name="runtime_heading"/>
+          <p:cNvSpPr txBox="1"/>
+          <p:nvPr/>
+        </p:nvSpPr>
+        <p:spPr>
+          <a:xfrm>
+            <a:off x="6565392" y="1417320"/>
+            <a:ext cx="4434840" cy="411480"/>
+          </a:xfrm>
+          <a:prstGeom prst="rect">
+            <a:avLst/>
+          </a:prstGeom>
+          <a:noFill/>
+        </p:spPr>
+        <p:txBody>
+          <a:bodyPr wrap="square" anchor="ctr" lIns="0" rIns="0" tIns="0" bIns="0">
+            <a:spAutoFit/>
+          </a:bodyPr>
+          <a:lstStyle/>
+          <a:p>
+            <a:r>
+              <a:rPr sz="2000" b="1">
+                <a:solidFill>
+                  <a:srgbClr val="7C3AED"/>
+                </a:solidFill>
+              </a:rPr>
+              <a:t>MDPR still decides</a:t>
+            </a:r>
+          </a:p>
+        </p:txBody>
+      </p:sp>
+      <p:sp>
+        <p:nvSpPr>
+          <p:cNvPr id="16" name="decision_0_num"/>
+          <p:cNvSpPr txBox="1"/>
+          <p:nvPr/>
+        </p:nvSpPr>
+        <p:spPr>
+          <a:xfrm>
+            <a:off x="6565392" y="2029968"/>
+            <a:ext cx="530352" cy="384048"/>
+          </a:xfrm>
+          <a:prstGeom prst="rect">
+            <a:avLst/>
+          </a:prstGeom>
+          <a:noFill/>
+        </p:spPr>
+        <p:txBody>
+          <a:bodyPr wrap="square" anchor="ctr" lIns="0" rIns="0" tIns="0" bIns="0">
+            <a:spAutoFit/>
+          </a:bodyPr>
+          <a:lstStyle/>
+          <a:p>
+            <a:r>
+              <a:rPr sz="1800" b="1">
+                <a:solidFill>
+                  <a:srgbClr val="7C3AED"/>
+                </a:solidFill>
+              </a:rPr>
+              <a:t>01</a:t>
+            </a:r>
+          </a:p>
+        </p:txBody>
+      </p:sp>
+      <p:sp>
+        <p:nvSpPr>
+          <p:cNvPr id="17" name="decision_0_title"/>
+          <p:cNvSpPr txBox="1"/>
+          <p:nvPr/>
+        </p:nvSpPr>
+        <p:spPr>
+          <a:xfrm>
+            <a:off x="7242048" y="2029968"/>
+            <a:ext cx="3566160" cy="310896"/>
+          </a:xfrm>
+          <a:prstGeom prst="rect">
+            <a:avLst/>
+          </a:prstGeom>
+          <a:noFill/>
+        </p:spPr>
+        <p:txBody>
+          <a:bodyPr wrap="square" anchor="ctr" lIns="0" rIns="0" tIns="0" bIns="0">
+            <a:spAutoFit/>
+          </a:bodyPr>
+          <a:lstStyle/>
+          <a:p>
+            <a:r>
+              <a:rPr sz="1800" b="1">
+                <a:solidFill>
+                  <a:srgbClr val="111827"/>
+                </a:solidFill>
+              </a:rPr>
+              <a:t>Exact geometry</a:t>
+            </a:r>
+          </a:p>
+        </p:txBody>
+      </p:sp>
+      <p:sp>
+        <p:nvSpPr>
+          <p:cNvPr id="18" name="decision_0_body"/>
+          <p:cNvSpPr txBox="1"/>
+          <p:nvPr/>
+        </p:nvSpPr>
+        <p:spPr>
+          <a:xfrm>
+            <a:off x="7242048" y="2414016"/>
+            <a:ext cx="3566160" cy="310896"/>
+          </a:xfrm>
+          <a:prstGeom prst="rect">
+            <a:avLst/>
+          </a:prstGeom>
+          <a:noFill/>
+        </p:spPr>
+        <p:txBody>
+          <a:bodyPr wrap="square" anchor="ctr" lIns="0" rIns="0" tIns="0" bIns="0">
+            <a:spAutoFit/>
+          </a:bodyPr>
+          <a:lstStyle/>
+          <a:p>
+            <a:r>
+              <a:rPr sz="1600" b="0">
+                <a:solidFill>
+                  <a:srgbClr val="5F6B7A"/>
+                </a:solidFill>
+              </a:rPr>
+              <a:t>regions and coordinates</a:t>
+            </a:r>
+          </a:p>
+        </p:txBody>
+      </p:sp>
+      <p:sp>
+        <p:nvSpPr>
+          <p:cNvPr id="19" name="decision_1_num"/>
+          <p:cNvSpPr txBox="1"/>
+          <p:nvPr/>
+        </p:nvSpPr>
+        <p:spPr>
+          <a:xfrm>
+            <a:off x="6565392" y="3127248"/>
+            <a:ext cx="530352" cy="384048"/>
+          </a:xfrm>
+          <a:prstGeom prst="rect">
+            <a:avLst/>
+          </a:prstGeom>
+          <a:noFill/>
+        </p:spPr>
+        <p:txBody>
+          <a:bodyPr wrap="square" anchor="ctr" lIns="0" rIns="0" tIns="0" bIns="0">
+            <a:spAutoFit/>
+          </a:bodyPr>
+          <a:lstStyle/>
+          <a:p>
+            <a:r>
+              <a:rPr sz="1800" b="1">
+                <a:solidFill>
+                  <a:srgbClr val="7C3AED"/>
+                </a:solidFill>
+              </a:rPr>
+              <a:t>02</a:t>
+            </a:r>
+          </a:p>
+        </p:txBody>
+      </p:sp>
+      <p:sp>
+        <p:nvSpPr>
+          <p:cNvPr id="20" name="decision_1_title"/>
+          <p:cNvSpPr txBox="1"/>
+          <p:nvPr/>
+        </p:nvSpPr>
+        <p:spPr>
+          <a:xfrm>
+            <a:off x="7242048" y="3127248"/>
+            <a:ext cx="3566160" cy="310896"/>
+          </a:xfrm>
+          <a:prstGeom prst="rect">
+            <a:avLst/>
+          </a:prstGeom>
+          <a:noFill/>
+        </p:spPr>
+        <p:txBody>
+          <a:bodyPr wrap="square" anchor="ctr" lIns="0" rIns="0" tIns="0" bIns="0">
+            <a:spAutoFit/>
+          </a:bodyPr>
+          <a:lstStyle/>
+          <a:p>
+            <a:r>
+              <a:rPr sz="1800" b="1">
+                <a:solidFill>
+                  <a:srgbClr val="111827"/>
+                </a:solidFill>
+              </a:rPr>
+              <a:t>Typography</a:t>
+            </a:r>
+          </a:p>
+        </p:txBody>
+      </p:sp>
+      <p:sp>
+        <p:nvSpPr>
+          <p:cNvPr id="21" name="decision_1_body"/>
+          <p:cNvSpPr txBox="1"/>
+          <p:nvPr/>
+        </p:nvSpPr>
+        <p:spPr>
+          <a:xfrm>
+            <a:off x="7242048" y="3511296"/>
+            <a:ext cx="3566160" cy="310896"/>
+          </a:xfrm>
+          <a:prstGeom prst="rect">
+            <a:avLst/>
+          </a:prstGeom>
+          <a:noFill/>
+        </p:spPr>
+        <p:txBody>
+          <a:bodyPr wrap="square" anchor="ctr" lIns="0" rIns="0" tIns="0" bIns="0">
+            <a:spAutoFit/>
+          </a:bodyPr>
+          <a:lstStyle/>
+          <a:p>
+            <a:r>
+              <a:rPr sz="1600" b="0">
+                <a:solidFill>
+                  <a:srgbClr val="5F6B7A"/>
+                </a:solidFill>
+              </a:rPr>
+              <a:t>font family, size, and wrapping</a:t>
+            </a:r>
+          </a:p>
+        </p:txBody>
+      </p:sp>
+      <p:sp>
+        <p:nvSpPr>
+          <p:cNvPr id="22" name="decision_2_num"/>
+          <p:cNvSpPr txBox="1"/>
+          <p:nvPr/>
+        </p:nvSpPr>
+        <p:spPr>
+          <a:xfrm>
+            <a:off x="6565392" y="4224528"/>
+            <a:ext cx="530352" cy="384048"/>
+          </a:xfrm>
+          <a:prstGeom prst="rect">
+            <a:avLst/>
+          </a:prstGeom>
+          <a:noFill/>
+        </p:spPr>
+        <p:txBody>
+          <a:bodyPr wrap="square" anchor="ctr" lIns="0" rIns="0" tIns="0" bIns="0">
+            <a:spAutoFit/>
+          </a:bodyPr>
+          <a:lstStyle/>
+          <a:p>
+            <a:r>
+              <a:rPr sz="1800" b="1">
+                <a:solidFill>
+                  <a:srgbClr val="7C3AED"/>
+                </a:solidFill>
+              </a:rPr>
+              <a:t>03</a:t>
+            </a:r>
+          </a:p>
+        </p:txBody>
+      </p:sp>
+      <p:sp>
+        <p:nvSpPr>
+          <p:cNvPr id="23" name="decision_2_title"/>
+          <p:cNvSpPr txBox="1"/>
+          <p:nvPr/>
+        </p:nvSpPr>
+        <p:spPr>
+          <a:xfrm>
+            <a:off x="7242048" y="4224528"/>
+            <a:ext cx="3566160" cy="310896"/>
+          </a:xfrm>
+          <a:prstGeom prst="rect">
+            <a:avLst/>
+          </a:prstGeom>
+          <a:noFill/>
+        </p:spPr>
+        <p:txBody>
+          <a:bodyPr wrap="square" anchor="ctr" lIns="0" rIns="0" tIns="0" bIns="0">
+            <a:spAutoFit/>
+          </a:bodyPr>
+          <a:lstStyle/>
+          <a:p>
+            <a:r>
+              <a:rPr sz="1800" b="1">
+                <a:solidFill>
+                  <a:srgbClr val="111827"/>
+                </a:solidFill>
+              </a:rPr>
+              <a:t>Pass or fail</a:t>
+            </a:r>
+          </a:p>
+        </p:txBody>
+      </p:sp>
+      <p:sp>
+        <p:nvSpPr>
+          <p:cNvPr id="24" name="decision_2_body"/>
+          <p:cNvSpPr txBox="1"/>
+          <p:nvPr/>
+        </p:nvSpPr>
+        <p:spPr>
+          <a:xfrm>
+            <a:off x="7242048" y="4608576"/>
+            <a:ext cx="3566160" cy="310896"/>
+          </a:xfrm>
+          <a:prstGeom prst="rect">
+            <a:avLst/>
+          </a:prstGeom>
+          <a:noFill/>
+        </p:spPr>
+        <p:txBody>
+          <a:bodyPr wrap="square" anchor="ctr" lIns="0" rIns="0" tIns="0" bIns="0">
+            <a:spAutoFit/>
+          </a:bodyPr>
+          <a:lstStyle/>
+          <a:p>
+            <a:r>
+              <a:rPr sz="1600" b="0">
+                <a:solidFill>
+                  <a:srgbClr val="5F6B7A"/>
+                </a:solidFill>
+              </a:rPr>
+              <a:t>deterministic validation result</a:t>
+            </a:r>
           </a:p>
         </p:txBody>
       </p:sp>

--- a/artifacts/mdpr-vs-skill/mdpr-skill-from-actual-md-run.pptx
+++ b/artifacts/mdpr-vs-skill/mdpr-skill-from-actual-md-run.pptx
@@ -3654,7 +3654,7 @@
                   <a:srgbClr val="5F6B7A"/>
                 </a:solidFill>
               </a:rPr>
-              <a:t>93,102 chars</a:t>
+              <a:t>93,383 chars</a:t>
             </a:r>
           </a:p>
         </p:txBody>
@@ -3954,7 +3954,7 @@
             <a:r>
               <a:rPr sz="1800" b="1">
                 <a:solidFill>
-                  <a:srgbClr val="7C3AED"/>
+                  <a:srgbClr val="0F766E"/>
                 </a:solidFill>
               </a:rPr>
               <a:t>2. MDPR output</a:t>
@@ -4023,7 +4023,7 @@
                   <a:srgbClr val="5F6B7A"/>
                 </a:solidFill>
               </a:rPr>
-              <a:t>449 editable text frames</a:t>
+              <a:t>442 editable text frames</a:t>
             </a:r>
           </a:p>
         </p:txBody>
@@ -4266,7 +4266,7 @@
             <a:r>
               <a:rPr sz="1800" b="1">
                 <a:solidFill>
-                  <a:srgbClr val="BE123C"/>
+                  <a:srgbClr val="7C3AED"/>
                 </a:solidFill>
               </a:rPr>
               <a:t>3. mdpr-skill review</a:t>
@@ -5322,7 +5322,7 @@
                   <a:srgbClr val="5F6B7A"/>
                 </a:solidFill>
               </a:rPr>
-              <a:t>63,182 chars</a:t>
+              <a:t>63,463 chars</a:t>
             </a:r>
           </a:p>
         </p:txBody>
@@ -13292,7 +13292,7 @@
                             <a:srgbClr val="111827"/>
                           </a:solidFill>
                         </a:rPr>
-                        <a:t>64,408</a:t>
+                        <a:t>64,689</a:t>
                       </a:r>
                     </a:p>
                   </a:txBody>
@@ -13600,7 +13600,7 @@
             <a:r>
               <a:rPr sz="2000" b="1">
                 <a:solidFill>
-                  <a:srgbClr val="0F766E"/>
+                  <a:srgbClr val="7C3AED"/>
                 </a:solidFill>
               </a:rPr>
               <a:t>mdpr-skill may suggest</a:t>
@@ -13623,11 +13623,11 @@
             <a:avLst/>
           </a:prstGeom>
           <a:solidFill>
-            <a:srgbClr val="0F766E"/>
+            <a:srgbClr val="7C3AED"/>
           </a:solidFill>
           <a:ln>
             <a:solidFill>
-              <a:srgbClr val="0F766E"/>
+              <a:srgbClr val="7C3AED"/>
             </a:solidFill>
           </a:ln>
         </p:spPr>
@@ -13734,11 +13734,11 @@
             <a:avLst/>
           </a:prstGeom>
           <a:solidFill>
-            <a:srgbClr val="0F766E"/>
+            <a:srgbClr val="7C3AED"/>
           </a:solidFill>
           <a:ln>
             <a:solidFill>
-              <a:srgbClr val="0F766E"/>
+              <a:srgbClr val="7C3AED"/>
             </a:solidFill>
           </a:ln>
         </p:spPr>
@@ -13845,11 +13845,11 @@
             <a:avLst/>
           </a:prstGeom>
           <a:solidFill>
-            <a:srgbClr val="0F766E"/>
+            <a:srgbClr val="7C3AED"/>
           </a:solidFill>
           <a:ln>
             <a:solidFill>
-              <a:srgbClr val="0F766E"/>
+              <a:srgbClr val="7C3AED"/>
             </a:solidFill>
           </a:ln>
         </p:spPr>
@@ -14011,7 +14011,7 @@
             <a:r>
               <a:rPr sz="2000" b="1">
                 <a:solidFill>
-                  <a:srgbClr val="7C3AED"/>
+                  <a:srgbClr val="0F766E"/>
                 </a:solidFill>
               </a:rPr>
               <a:t>MDPR still decides</a:t>
@@ -14044,7 +14044,7 @@
             <a:r>
               <a:rPr sz="1800" b="1">
                 <a:solidFill>
-                  <a:srgbClr val="7C3AED"/>
+                  <a:srgbClr val="0F766E"/>
                 </a:solidFill>
               </a:rPr>
               <a:t>01</a:t>
@@ -14143,7 +14143,7 @@
             <a:r>
               <a:rPr sz="1800" b="1">
                 <a:solidFill>
-                  <a:srgbClr val="7C3AED"/>
+                  <a:srgbClr val="0F766E"/>
                 </a:solidFill>
               </a:rPr>
               <a:t>02</a:t>
@@ -14242,7 +14242,7 @@
             <a:r>
               <a:rPr sz="1800" b="1">
                 <a:solidFill>
-                  <a:srgbClr val="7C3AED"/>
+                  <a:srgbClr val="0F766E"/>
                 </a:solidFill>
               </a:rPr>
               <a:t>03</a:t>

--- a/artifacts/mdpr-vs-skill/mdpr-skill-from-actual-md-run.pptx
+++ b/artifacts/mdpr-vs-skill/mdpr-skill-from-actual-md-run.pptx
@@ -162,7 +162,7 @@
                 <c:formatCode>General</c:formatCode>
                 <c:ptCount val="3"/>
                 <c:pt idx="0">
-                  <c:v>129</c:v>
+                  <c:v>130</c:v>
                 </c:pt>
                 <c:pt idx="1">
                   <c:v>41</c:v>
@@ -3621,7 +3621,7 @@
                   <a:srgbClr val="5F6B7A"/>
                 </a:solidFill>
               </a:rPr>
-              <a:t>184 headings</a:t>
+              <a:t>185 headings</a:t>
             </a:r>
           </a:p>
         </p:txBody>
@@ -3654,7 +3654,7 @@
                   <a:srgbClr val="5F6B7A"/>
                 </a:solidFill>
               </a:rPr>
-              <a:t>93,383 chars</a:t>
+              <a:t>95,656 chars</a:t>
             </a:r>
           </a:p>
         </p:txBody>
@@ -4023,7 +4023,7 @@
                   <a:srgbClr val="5F6B7A"/>
                 </a:solidFill>
               </a:rPr>
-              <a:t>442 editable text frames</a:t>
+              <a:t>440 editable text frames</a:t>
             </a:r>
           </a:p>
         </p:txBody>
@@ -5322,7 +5322,7 @@
                   <a:srgbClr val="5F6B7A"/>
                 </a:solidFill>
               </a:rPr>
-              <a:t>63,463 chars</a:t>
+              <a:t>65,736 chars</a:t>
             </a:r>
           </a:p>
         </p:txBody>
@@ -13271,7 +13271,7 @@
                             <a:srgbClr val="111827"/>
                           </a:solidFill>
                         </a:rPr>
-                        <a:t>129</a:t>
+                        <a:t>130</a:t>
                       </a:r>
                     </a:p>
                   </a:txBody>
@@ -13292,7 +13292,7 @@
                             <a:srgbClr val="111827"/>
                           </a:solidFill>
                         </a:rPr>
-                        <a:t>64,689</a:t>
+                        <a:t>66,962</a:t>
                       </a:r>
                     </a:p>
                   </a:txBody>

--- a/artifacts/mdpr-vs-skill/mdpr-skill-from-actual-md-run.pptx
+++ b/artifacts/mdpr-vs-skill/mdpr-skill-from-actual-md-run.pptx
@@ -3654,7 +3654,7 @@
                   <a:srgbClr val="5F6B7A"/>
                 </a:solidFill>
               </a:rPr>
-              <a:t>95,656 chars</a:t>
+              <a:t>96,298 chars</a:t>
             </a:r>
           </a:p>
         </p:txBody>
@@ -5322,7 +5322,7 @@
                   <a:srgbClr val="5F6B7A"/>
                 </a:solidFill>
               </a:rPr>
-              <a:t>65,736 chars</a:t>
+              <a:t>65,954 chars</a:t>
             </a:r>
           </a:p>
         </p:txBody>
@@ -5808,7 +5808,7 @@
                   <a:srgbClr val="5F6B7A"/>
                 </a:solidFill>
               </a:rPr>
-              <a:t>21,255 chars</a:t>
+              <a:t>21,679 chars</a:t>
             </a:r>
           </a:p>
         </p:txBody>
@@ -13292,7 +13292,7 @@
                             <a:srgbClr val="111827"/>
                           </a:solidFill>
                         </a:rPr>
-                        <a:t>66,962</a:t>
+                        <a:t>67,180</a:t>
                       </a:r>
                     </a:p>
                   </a:txBody>
@@ -13464,7 +13464,7 @@
                             <a:srgbClr val="111827"/>
                           </a:solidFill>
                         </a:rPr>
-                        <a:t>21,255</a:t>
+                        <a:t>21,679</a:t>
                       </a:r>
                     </a:p>
                   </a:txBody>

--- a/artifacts/mdpr-vs-skill/mdpr-skill-from-actual-md-run.pptx
+++ b/artifacts/mdpr-vs-skill/mdpr-skill-from-actual-md-run.pptx
@@ -4023,7 +4023,7 @@
                   <a:srgbClr val="5F6B7A"/>
                 </a:solidFill>
               </a:rPr>
-              <a:t>440 editable text frames</a:t>
+              <a:t>392 editable text frames</a:t>
             </a:r>
           </a:p>
         </p:txBody>

--- a/artifacts/mdpr-vs-skill/mdpr-skill-from-actual-md-run.pptx
+++ b/artifacts/mdpr-vs-skill/mdpr-skill-from-actual-md-run.pptx
@@ -3654,7 +3654,7 @@
                   <a:srgbClr val="5F6B7A"/>
                 </a:solidFill>
               </a:rPr>
-              <a:t>96,298 chars</a:t>
+              <a:t>96,797 chars</a:t>
             </a:r>
           </a:p>
         </p:txBody>
@@ -5322,7 +5322,7 @@
                   <a:srgbClr val="5F6B7A"/>
                 </a:solidFill>
               </a:rPr>
-              <a:t>65,954 chars</a:t>
+              <a:t>66,453 chars</a:t>
             </a:r>
           </a:p>
         </p:txBody>
@@ -13292,7 +13292,7 @@
                             <a:srgbClr val="111827"/>
                           </a:solidFill>
                         </a:rPr>
-                        <a:t>67,180</a:t>
+                        <a:t>67,679</a:t>
                       </a:r>
                     </a:p>
                   </a:txBody>

--- a/artifacts/mdpr-vs-skill/mdpr-skill-from-actual-md-run.pptx
+++ b/artifacts/mdpr-vs-skill/mdpr-skill-from-actual-md-run.pptx
@@ -3654,7 +3654,7 @@
                   <a:srgbClr val="5F6B7A"/>
                 </a:solidFill>
               </a:rPr>
-              <a:t>96,797 chars</a:t>
+              <a:t>97,285 chars</a:t>
             </a:r>
           </a:p>
         </p:txBody>
@@ -5322,7 +5322,7 @@
                   <a:srgbClr val="5F6B7A"/>
                 </a:solidFill>
               </a:rPr>
-              <a:t>66,453 chars</a:t>
+              <a:t>66,941 chars</a:t>
             </a:r>
           </a:p>
         </p:txBody>
@@ -13292,7 +13292,7 @@
                             <a:srgbClr val="111827"/>
                           </a:solidFill>
                         </a:rPr>
-                        <a:t>67,679</a:t>
+                        <a:t>68,167</a:t>
                       </a:r>
                     </a:p>
                   </a:txBody>

--- a/artifacts/mdpr-vs-skill/mdpr-skill-from-actual-md-run.pptx
+++ b/artifacts/mdpr-vs-skill/mdpr-skill-from-actual-md-run.pptx
@@ -3654,7 +3654,7 @@
                   <a:srgbClr val="5F6B7A"/>
                 </a:solidFill>
               </a:rPr>
-              <a:t>97,285 chars</a:t>
+              <a:t>97,648 chars</a:t>
             </a:r>
           </a:p>
         </p:txBody>
@@ -5808,7 +5808,7 @@
                   <a:srgbClr val="5F6B7A"/>
                 </a:solidFill>
               </a:rPr>
-              <a:t>21,679 chars</a:t>
+              <a:t>22,042 chars</a:t>
             </a:r>
           </a:p>
         </p:txBody>
@@ -13464,7 +13464,7 @@
                             <a:srgbClr val="111827"/>
                           </a:solidFill>
                         </a:rPr>
-                        <a:t>21,679</a:t>
+                        <a:t>22,042</a:t>
                       </a:r>
                     </a:p>
                   </a:txBody>

--- a/artifacts/mdpr-vs-skill/mdpr-skill-from-actual-md-run.pptx
+++ b/artifacts/mdpr-vs-skill/mdpr-skill-from-actual-md-run.pptx
@@ -3654,7 +3654,7 @@
                   <a:srgbClr val="5F6B7A"/>
                 </a:solidFill>
               </a:rPr>
-              <a:t>97,648 chars</a:t>
+              <a:t>97,847 chars</a:t>
             </a:r>
           </a:p>
         </p:txBody>
@@ -4023,7 +4023,7 @@
                   <a:srgbClr val="5F6B7A"/>
                 </a:solidFill>
               </a:rPr>
-              <a:t>392 editable text frames</a:t>
+              <a:t>389 editable text frames</a:t>
             </a:r>
           </a:p>
         </p:txBody>
@@ -5808,7 +5808,7 @@
                   <a:srgbClr val="5F6B7A"/>
                 </a:solidFill>
               </a:rPr>
-              <a:t>22,042 chars</a:t>
+              <a:t>22,241 chars</a:t>
             </a:r>
           </a:p>
         </p:txBody>
@@ -13464,7 +13464,7 @@
                             <a:srgbClr val="111827"/>
                           </a:solidFill>
                         </a:rPr>
-                        <a:t>22,042</a:t>
+                        <a:t>22,241</a:t>
                       </a:r>
                     </a:p>
                   </a:txBody>

--- a/artifacts/mdpr-vs-skill/mdpr-skill-from-actual-md-run.pptx
+++ b/artifacts/mdpr-vs-skill/mdpr-skill-from-actual-md-run.pptx
@@ -144,7 +144,7 @@
               <c:strCache>
                 <c:ptCount val="3"/>
                 <c:pt idx="0">
-                  <c:v>Docs</c:v>
+                  <c:v>Docs + ADR</c:v>
                 </c:pt>
                 <c:pt idx="1">
                   <c:v>Examples</c:v>
@@ -3654,7 +3654,7 @@
                   <a:srgbClr val="5F6B7A"/>
                 </a:solidFill>
               </a:rPr>
-              <a:t>97,847 chars</a:t>
+              <a:t>97,905 chars</a:t>
             </a:r>
           </a:p>
         </p:txBody>
@@ -5808,7 +5808,7 @@
                   <a:srgbClr val="5F6B7A"/>
                 </a:solidFill>
               </a:rPr>
-              <a:t>22,241 chars</a:t>
+              <a:t>22,299 chars</a:t>
             </a:r>
           </a:p>
         </p:txBody>
@@ -13229,7 +13229,7 @@
                             <a:srgbClr val="111827"/>
                           </a:solidFill>
                         </a:rPr>
-                        <a:t>Docs</a:t>
+                        <a:t>Docs + ADR</a:t>
                       </a:r>
                     </a:p>
                   </a:txBody>
@@ -13464,7 +13464,7 @@
                             <a:srgbClr val="111827"/>
                           </a:solidFill>
                         </a:rPr>
-                        <a:t>22,241</a:t>
+                        <a:t>22,299</a:t>
                       </a:r>
                     </a:p>
                   </a:txBody>

--- a/artifacts/mdpr-vs-skill/mdpr-skill-from-actual-md-run.pptx
+++ b/artifacts/mdpr-vs-skill/mdpr-skill-from-actual-md-run.pptx
@@ -3654,7 +3654,7 @@
                   <a:srgbClr val="5F6B7A"/>
                 </a:solidFill>
               </a:rPr>
-              <a:t>97,905 chars</a:t>
+              <a:t>98,301 chars</a:t>
             </a:r>
           </a:p>
         </p:txBody>
@@ -5322,7 +5322,7 @@
                   <a:srgbClr val="5F6B7A"/>
                 </a:solidFill>
               </a:rPr>
-              <a:t>66,941 chars</a:t>
+              <a:t>67,337 chars</a:t>
             </a:r>
           </a:p>
         </p:txBody>
@@ -13292,7 +13292,7 @@
                             <a:srgbClr val="111827"/>
                           </a:solidFill>
                         </a:rPr>
-                        <a:t>68,167</a:t>
+                        <a:t>68,563</a:t>
                       </a:r>
                     </a:p>
                   </a:txBody>

--- a/artifacts/mdpr-vs-skill/mdpr-skill-from-actual-md-run.pptx
+++ b/artifacts/mdpr-vs-skill/mdpr-skill-from-actual-md-run.pptx
@@ -3654,7 +3654,7 @@
                   <a:srgbClr val="5F6B7A"/>
                 </a:solidFill>
               </a:rPr>
-              <a:t>98,301 chars</a:t>
+              <a:t>100,214 chars</a:t>
             </a:r>
           </a:p>
         </p:txBody>
@@ -3990,7 +3990,7 @@
                   <a:srgbClr val="5F6B7A"/>
                 </a:solidFill>
               </a:rPr>
-              <a:t>35 slides</a:t>
+              <a:t>32 slides</a:t>
             </a:r>
           </a:p>
         </p:txBody>
@@ -4023,7 +4023,7 @@
                   <a:srgbClr val="5F6B7A"/>
                 </a:solidFill>
               </a:rPr>
-              <a:t>389 editable text frames</a:t>
+              <a:t>344 editable text frames</a:t>
             </a:r>
           </a:p>
         </p:txBody>
@@ -4056,7 +4056,7 @@
                   <a:srgbClr val="5F6B7A"/>
                 </a:solidFill>
               </a:rPr>
-              <a:t>3 tables, 0 charts</a:t>
+              <a:t>5 tables, 0 charts</a:t>
             </a:r>
           </a:p>
         </p:txBody>
@@ -5322,7 +5322,7 @@
                   <a:srgbClr val="5F6B7A"/>
                 </a:solidFill>
               </a:rPr>
-              <a:t>67,337 chars</a:t>
+              <a:t>68,805 chars</a:t>
             </a:r>
           </a:p>
         </p:txBody>
@@ -5808,7 +5808,7 @@
                   <a:srgbClr val="5F6B7A"/>
                 </a:solidFill>
               </a:rPr>
-              <a:t>22,299 chars</a:t>
+              <a:t>22,744 chars</a:t>
             </a:r>
           </a:p>
         </p:txBody>
@@ -13292,7 +13292,7 @@
                             <a:srgbClr val="111827"/>
                           </a:solidFill>
                         </a:rPr>
-                        <a:t>68,563</a:t>
+                        <a:t>70,031</a:t>
                       </a:r>
                     </a:p>
                   </a:txBody>
@@ -13464,7 +13464,7 @@
                             <a:srgbClr val="111827"/>
                           </a:solidFill>
                         </a:rPr>
-                        <a:t>22,299</a:t>
+                        <a:t>22,744</a:t>
                       </a:r>
                     </a:p>
                   </a:txBody>

--- a/artifacts/mdpr-vs-skill/mdpr-skill-from-actual-md-run.pptx
+++ b/artifacts/mdpr-vs-skill/mdpr-skill-from-actual-md-run.pptx
@@ -3654,7 +3654,7 @@
                   <a:srgbClr val="5F6B7A"/>
                 </a:solidFill>
               </a:rPr>
-              <a:t>100,214 chars</a:t>
+              <a:t>102,167 chars</a:t>
             </a:r>
           </a:p>
         </p:txBody>
@@ -5322,7 +5322,7 @@
                   <a:srgbClr val="5F6B7A"/>
                 </a:solidFill>
               </a:rPr>
-              <a:t>68,805 chars</a:t>
+              <a:t>69,918 chars</a:t>
             </a:r>
           </a:p>
         </p:txBody>
@@ -5808,7 +5808,7 @@
                   <a:srgbClr val="5F6B7A"/>
                 </a:solidFill>
               </a:rPr>
-              <a:t>22,744 chars</a:t>
+              <a:t>23,584 chars</a:t>
             </a:r>
           </a:p>
         </p:txBody>
@@ -13292,7 +13292,7 @@
                             <a:srgbClr val="111827"/>
                           </a:solidFill>
                         </a:rPr>
-                        <a:t>70,031</a:t>
+                        <a:t>71,144</a:t>
                       </a:r>
                     </a:p>
                   </a:txBody>
@@ -13464,7 +13464,7 @@
                             <a:srgbClr val="111827"/>
                           </a:solidFill>
                         </a:rPr>
-                        <a:t>22,744</a:t>
+                        <a:t>23,584</a:t>
                       </a:r>
                     </a:p>
                   </a:txBody>

--- a/artifacts/mdpr-vs-skill/mdpr-skill-from-actual-md-run.pptx
+++ b/artifacts/mdpr-vs-skill/mdpr-skill-from-actual-md-run.pptx
@@ -3654,7 +3654,7 @@
                   <a:srgbClr val="5F6B7A"/>
                 </a:solidFill>
               </a:rPr>
-              <a:t>102,167 chars</a:t>
+              <a:t>104,627 chars</a:t>
             </a:r>
           </a:p>
         </p:txBody>
@@ -5322,7 +5322,7 @@
                   <a:srgbClr val="5F6B7A"/>
                 </a:solidFill>
               </a:rPr>
-              <a:t>69,918 chars</a:t>
+              <a:t>71,930 chars</a:t>
             </a:r>
           </a:p>
         </p:txBody>
@@ -5808,7 +5808,7 @@
                   <a:srgbClr val="5F6B7A"/>
                 </a:solidFill>
               </a:rPr>
-              <a:t>23,584 chars</a:t>
+              <a:t>24,032 chars</a:t>
             </a:r>
           </a:p>
         </p:txBody>
@@ -13292,7 +13292,7 @@
                             <a:srgbClr val="111827"/>
                           </a:solidFill>
                         </a:rPr>
-                        <a:t>71,144</a:t>
+                        <a:t>73,156</a:t>
                       </a:r>
                     </a:p>
                   </a:txBody>
@@ -13464,7 +13464,7 @@
                             <a:srgbClr val="111827"/>
                           </a:solidFill>
                         </a:rPr>
-                        <a:t>23,584</a:t>
+                        <a:t>24,032</a:t>
                       </a:r>
                     </a:p>
                   </a:txBody>

--- a/artifacts/mdpr-vs-skill/mdpr-skill-from-actual-md-run.pptx
+++ b/artifacts/mdpr-vs-skill/mdpr-skill-from-actual-md-run.pptx
@@ -168,7 +168,7 @@
                   <c:v>41</c:v>
                 </c:pt>
                 <c:pt idx="2">
-                  <c:v>14</c:v>
+                  <c:v>15</c:v>
                 </c:pt>
               </c:numCache>
             </c:numRef>
@@ -3621,7 +3621,7 @@
                   <a:srgbClr val="5F6B7A"/>
                 </a:solidFill>
               </a:rPr>
-              <a:t>185 headings</a:t>
+              <a:t>186 headings</a:t>
             </a:r>
           </a:p>
         </p:txBody>
@@ -3654,7 +3654,7 @@
                   <a:srgbClr val="5F6B7A"/>
                 </a:solidFill>
               </a:rPr>
-              <a:t>104,627 chars</a:t>
+              <a:t>104,352 chars</a:t>
             </a:r>
           </a:p>
         </p:txBody>
@@ -5808,7 +5808,7 @@
                   <a:srgbClr val="5F6B7A"/>
                 </a:solidFill>
               </a:rPr>
-              <a:t>24,032 chars</a:t>
+              <a:t>23,757 chars</a:t>
             </a:r>
           </a:p>
         </p:txBody>
@@ -13443,7 +13443,7 @@
                             <a:srgbClr val="111827"/>
                           </a:solidFill>
                         </a:rPr>
-                        <a:t>14</a:t>
+                        <a:t>15</a:t>
                       </a:r>
                     </a:p>
                   </a:txBody>
@@ -13464,7 +13464,7 @@
                             <a:srgbClr val="111827"/>
                           </a:solidFill>
                         </a:rPr>
-                        <a:t>24,032</a:t>
+                        <a:t>23,757</a:t>
                       </a:r>
                     </a:p>
                   </a:txBody>

--- a/artifacts/mdpr-vs-skill/mdpr-skill-from-actual-md-run.pptx
+++ b/artifacts/mdpr-vs-skill/mdpr-skill-from-actual-md-run.pptx
@@ -11051,24 +11051,24 @@
       </p:sp>
       <p:sp>
         <p:nvSpPr>
-          <p:cNvPr id="4" name="example_0_card"/>
+          <p:cNvPr id="4" name="example_0_icon_doc"/>
           <p:cNvSpPr/>
           <p:nvPr/>
         </p:nvSpPr>
         <p:spPr>
           <a:xfrm>
-            <a:off x="658368" y="1353312"/>
-            <a:ext cx="3154680" cy="1737360"/>
+            <a:off x="822959" y="1517904"/>
+            <a:ext cx="285292" cy="368503"/>
           </a:xfrm>
           <a:prstGeom prst="roundRect">
             <a:avLst/>
           </a:prstGeom>
           <a:solidFill>
-            <a:srgbClr val="FFFDF8"/>
+            <a:srgbClr val="111827"/>
           </a:solidFill>
           <a:ln>
             <a:solidFill>
-              <a:srgbClr val="D7CDBD"/>
+              <a:srgbClr val="111827"/>
             </a:solidFill>
           </a:ln>
         </p:spPr>
@@ -11096,13 +11096,247 @@
       </p:sp>
       <p:sp>
         <p:nvSpPr>
-          <p:cNvPr id="5" name="example_0_icon_doc"/>
+          <p:cNvPr id="5" name="example_0_icon_line_0"/>
           <p:cNvSpPr/>
           <p:nvPr/>
         </p:nvSpPr>
         <p:spPr>
           <a:xfrm>
-            <a:off x="822959" y="1517904"/>
+            <a:off x="894283" y="1613001"/>
+            <a:ext cx="148590" cy="20802"/>
+          </a:xfrm>
+          <a:prstGeom prst="rect">
+            <a:avLst/>
+          </a:prstGeom>
+          <a:solidFill>
+            <a:srgbClr val="F7F2EA"/>
+          </a:solidFill>
+          <a:ln>
+            <a:solidFill>
+              <a:srgbClr val="F7F2EA"/>
+            </a:solidFill>
+          </a:ln>
+        </p:spPr>
+        <p:style>
+          <a:lnRef idx="1">
+            <a:schemeClr val="accent1"/>
+          </a:lnRef>
+          <a:fillRef idx="3">
+            <a:schemeClr val="accent1"/>
+          </a:fillRef>
+          <a:effectRef idx="2">
+            <a:schemeClr val="accent1"/>
+          </a:effectRef>
+          <a:fontRef idx="minor">
+            <a:schemeClr val="lt1"/>
+          </a:fontRef>
+        </p:style>
+        <p:txBody>
+          <a:bodyPr rtlCol="0" anchor="ctr"/>
+          <a:lstStyle/>
+          <a:p>
+            <a:pPr algn="ctr"/>
+          </a:p>
+        </p:txBody>
+      </p:sp>
+      <p:sp>
+        <p:nvSpPr>
+          <p:cNvPr id="6" name="example_0_icon_line_1"/>
+          <p:cNvSpPr/>
+          <p:nvPr/>
+        </p:nvSpPr>
+        <p:spPr>
+          <a:xfrm>
+            <a:off x="894283" y="1690268"/>
+            <a:ext cx="148590" cy="20802"/>
+          </a:xfrm>
+          <a:prstGeom prst="rect">
+            <a:avLst/>
+          </a:prstGeom>
+          <a:solidFill>
+            <a:srgbClr val="F7F2EA"/>
+          </a:solidFill>
+          <a:ln>
+            <a:solidFill>
+              <a:srgbClr val="F7F2EA"/>
+            </a:solidFill>
+          </a:ln>
+        </p:spPr>
+        <p:style>
+          <a:lnRef idx="1">
+            <a:schemeClr val="accent1"/>
+          </a:lnRef>
+          <a:fillRef idx="3">
+            <a:schemeClr val="accent1"/>
+          </a:fillRef>
+          <a:effectRef idx="2">
+            <a:schemeClr val="accent1"/>
+          </a:effectRef>
+          <a:fontRef idx="minor">
+            <a:schemeClr val="lt1"/>
+          </a:fontRef>
+        </p:style>
+        <p:txBody>
+          <a:bodyPr rtlCol="0" anchor="ctr"/>
+          <a:lstStyle/>
+          <a:p>
+            <a:pPr algn="ctr"/>
+          </a:p>
+        </p:txBody>
+      </p:sp>
+      <p:sp>
+        <p:nvSpPr>
+          <p:cNvPr id="7" name="example_0_icon_line_2"/>
+          <p:cNvSpPr/>
+          <p:nvPr/>
+        </p:nvSpPr>
+        <p:spPr>
+          <a:xfrm>
+            <a:off x="894283" y="1767535"/>
+            <a:ext cx="148590" cy="20802"/>
+          </a:xfrm>
+          <a:prstGeom prst="rect">
+            <a:avLst/>
+          </a:prstGeom>
+          <a:solidFill>
+            <a:srgbClr val="F7F2EA"/>
+          </a:solidFill>
+          <a:ln>
+            <a:solidFill>
+              <a:srgbClr val="F7F2EA"/>
+            </a:solidFill>
+          </a:ln>
+        </p:spPr>
+        <p:style>
+          <a:lnRef idx="1">
+            <a:schemeClr val="accent1"/>
+          </a:lnRef>
+          <a:fillRef idx="3">
+            <a:schemeClr val="accent1"/>
+          </a:fillRef>
+          <a:effectRef idx="2">
+            <a:schemeClr val="accent1"/>
+          </a:effectRef>
+          <a:fontRef idx="minor">
+            <a:schemeClr val="lt1"/>
+          </a:fontRef>
+        </p:style>
+        <p:txBody>
+          <a:bodyPr rtlCol="0" anchor="ctr"/>
+          <a:lstStyle/>
+          <a:p>
+            <a:pPr algn="ctr"/>
+          </a:p>
+        </p:txBody>
+      </p:sp>
+      <p:sp>
+        <p:nvSpPr>
+          <p:cNvPr id="8" name="example_0_title"/>
+          <p:cNvSpPr txBox="1"/>
+          <p:nvPr/>
+        </p:nvSpPr>
+        <p:spPr>
+          <a:xfrm>
+            <a:off x="1463040" y="1536192"/>
+            <a:ext cx="2167128" cy="347472"/>
+          </a:xfrm>
+          <a:prstGeom prst="rect">
+            <a:avLst/>
+          </a:prstGeom>
+          <a:noFill/>
+        </p:spPr>
+        <p:txBody>
+          <a:bodyPr wrap="square" anchor="ctr" lIns="0" rIns="0" tIns="0" bIns="0">
+            <a:spAutoFit/>
+          </a:bodyPr>
+          <a:lstStyle/>
+          <a:p>
+            <a:r>
+              <a:rPr sz="1800" b="1">
+                <a:solidFill>
+                  <a:srgbClr val="0F766E"/>
+                </a:solidFill>
+              </a:rPr>
+              <a:t>Basic</a:t>
+            </a:r>
+          </a:p>
+        </p:txBody>
+      </p:sp>
+      <p:sp>
+        <p:nvSpPr>
+          <p:cNvPr id="9" name="example_0_body_0"/>
+          <p:cNvSpPr txBox="1"/>
+          <p:nvPr/>
+        </p:nvSpPr>
+        <p:spPr>
+          <a:xfrm>
+            <a:off x="1463040" y="1993391"/>
+            <a:ext cx="2167128" cy="310896"/>
+          </a:xfrm>
+          <a:prstGeom prst="rect">
+            <a:avLst/>
+          </a:prstGeom>
+          <a:noFill/>
+        </p:spPr>
+        <p:txBody>
+          <a:bodyPr wrap="square" anchor="ctr" lIns="0" rIns="0" tIns="0" bIns="0">
+            <a:spAutoFit/>
+          </a:bodyPr>
+          <a:lstStyle/>
+          <a:p>
+            <a:r>
+              <a:rPr sz="1600" b="0">
+                <a:solidFill>
+                  <a:srgbClr val="5F6B7A"/>
+                </a:solidFill>
+              </a:rPr>
+              <a:t>AI Workflow Automation Proposal</a:t>
+            </a:r>
+          </a:p>
+        </p:txBody>
+      </p:sp>
+      <p:sp>
+        <p:nvSpPr>
+          <p:cNvPr id="10" name="example_0_body_1"/>
+          <p:cNvSpPr txBox="1"/>
+          <p:nvPr/>
+        </p:nvSpPr>
+        <p:spPr>
+          <a:xfrm>
+            <a:off x="1463040" y="2377439"/>
+            <a:ext cx="2167128" cy="310896"/>
+          </a:xfrm>
+          <a:prstGeom prst="rect">
+            <a:avLst/>
+          </a:prstGeom>
+          <a:noFill/>
+        </p:spPr>
+        <p:txBody>
+          <a:bodyPr wrap="square" anchor="ctr" lIns="0" rIns="0" tIns="0" bIns="0">
+            <a:spAutoFit/>
+          </a:bodyPr>
+          <a:lstStyle/>
+          <a:p>
+            <a:r>
+              <a:rPr sz="1600" b="0">
+                <a:solidFill>
+                  <a:srgbClr val="5F6B7A"/>
+                </a:solidFill>
+              </a:rPr>
+              <a:t>10 headings · 1,255 chars</a:t>
+            </a:r>
+          </a:p>
+        </p:txBody>
+      </p:sp>
+      <p:sp>
+        <p:nvSpPr>
+          <p:cNvPr id="11" name="example_1_icon_doc"/>
+          <p:cNvSpPr/>
+          <p:nvPr/>
+        </p:nvSpPr>
+        <p:spPr>
+          <a:xfrm>
+            <a:off x="4480559" y="1517904"/>
             <a:ext cx="285292" cy="368503"/>
           </a:xfrm>
           <a:prstGeom prst="roundRect">
@@ -11141,13 +11375,13 @@
       </p:sp>
       <p:sp>
         <p:nvSpPr>
-          <p:cNvPr id="6" name="example_0_icon_line_0"/>
+          <p:cNvPr id="12" name="example_1_icon_line_0"/>
           <p:cNvSpPr/>
           <p:nvPr/>
         </p:nvSpPr>
         <p:spPr>
           <a:xfrm>
-            <a:off x="894283" y="1613001"/>
+            <a:off x="4551883" y="1613001"/>
             <a:ext cx="148590" cy="20802"/>
           </a:xfrm>
           <a:prstGeom prst="rect">
@@ -11186,13 +11420,13 @@
       </p:sp>
       <p:sp>
         <p:nvSpPr>
-          <p:cNvPr id="7" name="example_0_icon_line_1"/>
+          <p:cNvPr id="13" name="example_1_icon_line_1"/>
           <p:cNvSpPr/>
           <p:nvPr/>
         </p:nvSpPr>
         <p:spPr>
           <a:xfrm>
-            <a:off x="894283" y="1690268"/>
+            <a:off x="4551883" y="1690268"/>
             <a:ext cx="148590" cy="20802"/>
           </a:xfrm>
           <a:prstGeom prst="rect">
@@ -11231,13 +11465,13 @@
       </p:sp>
       <p:sp>
         <p:nvSpPr>
-          <p:cNvPr id="8" name="example_0_icon_line_2"/>
+          <p:cNvPr id="14" name="example_1_icon_line_2"/>
           <p:cNvSpPr/>
           <p:nvPr/>
         </p:nvSpPr>
         <p:spPr>
           <a:xfrm>
-            <a:off x="894283" y="1767535"/>
+            <a:off x="4551883" y="1767535"/>
             <a:ext cx="148590" cy="20802"/>
           </a:xfrm>
           <a:prstGeom prst="rect">
@@ -11276,13 +11510,13 @@
       </p:sp>
       <p:sp>
         <p:nvSpPr>
-          <p:cNvPr id="9" name="example_0_title"/>
+          <p:cNvPr id="15" name="example_1_title"/>
           <p:cNvSpPr txBox="1"/>
           <p:nvPr/>
         </p:nvSpPr>
         <p:spPr>
           <a:xfrm>
-            <a:off x="1463040" y="1536192"/>
+            <a:off x="5120640" y="1536192"/>
             <a:ext cx="2167128" cy="347472"/>
           </a:xfrm>
           <a:prstGeom prst="rect">
@@ -11299,23 +11533,23 @@
             <a:r>
               <a:rPr sz="1800" b="1">
                 <a:solidFill>
-                  <a:srgbClr val="0F766E"/>
+                  <a:srgbClr val="7C3AED"/>
                 </a:solidFill>
               </a:rPr>
-              <a:t>Basic</a:t>
-            </a:r>
-          </a:p>
-        </p:txBody>
-      </p:sp>
-      <p:sp>
-        <p:nvSpPr>
-          <p:cNvPr id="10" name="example_0_body_0"/>
+              <a:t>Comparison</a:t>
+            </a:r>
+          </a:p>
+        </p:txBody>
+      </p:sp>
+      <p:sp>
+        <p:nvSpPr>
+          <p:cNvPr id="16" name="example_1_body_0"/>
           <p:cNvSpPr txBox="1"/>
           <p:nvPr/>
         </p:nvSpPr>
         <p:spPr>
           <a:xfrm>
-            <a:off x="1463040" y="1993391"/>
+            <a:off x="5120640" y="1993391"/>
             <a:ext cx="2167128" cy="310896"/>
           </a:xfrm>
           <a:prstGeom prst="rect">
@@ -11335,20 +11569,20 @@
                   <a:srgbClr val="5F6B7A"/>
                 </a:solidFill>
               </a:rPr>
-              <a:t>AI Workflow Automation Proposal</a:t>
-            </a:r>
-          </a:p>
-        </p:txBody>
-      </p:sp>
-      <p:sp>
-        <p:nvSpPr>
-          <p:cNvPr id="11" name="example_0_body_1"/>
+              <a:t>Comparison Structure Example</a:t>
+            </a:r>
+          </a:p>
+        </p:txBody>
+      </p:sp>
+      <p:sp>
+        <p:nvSpPr>
+          <p:cNvPr id="17" name="example_1_body_1"/>
           <p:cNvSpPr txBox="1"/>
           <p:nvPr/>
         </p:nvSpPr>
         <p:spPr>
           <a:xfrm>
-            <a:off x="1463040" y="2377439"/>
+            <a:off x="5120640" y="2377439"/>
             <a:ext cx="2167128" cy="310896"/>
           </a:xfrm>
           <a:prstGeom prst="rect">
@@ -11368,31 +11602,31 @@
                   <a:srgbClr val="5F6B7A"/>
                 </a:solidFill>
               </a:rPr>
-              <a:t>10 headings · 1,255 chars</a:t>
-            </a:r>
-          </a:p>
-        </p:txBody>
-      </p:sp>
-      <p:sp>
-        <p:nvSpPr>
-          <p:cNvPr id="12" name="example_1_card"/>
+              <a:t>4 headings · 307 chars</a:t>
+            </a:r>
+          </a:p>
+        </p:txBody>
+      </p:sp>
+      <p:sp>
+        <p:nvSpPr>
+          <p:cNvPr id="18" name="example_2_icon_doc"/>
           <p:cNvSpPr/>
           <p:nvPr/>
         </p:nvSpPr>
         <p:spPr>
           <a:xfrm>
-            <a:off x="4315968" y="1353312"/>
-            <a:ext cx="3154680" cy="1737360"/>
+            <a:off x="8138160" y="1517904"/>
+            <a:ext cx="285292" cy="368503"/>
           </a:xfrm>
           <a:prstGeom prst="roundRect">
             <a:avLst/>
           </a:prstGeom>
           <a:solidFill>
-            <a:srgbClr val="FFFDF8"/>
+            <a:srgbClr val="111827"/>
           </a:solidFill>
           <a:ln>
             <a:solidFill>
-              <a:srgbClr val="D7CDBD"/>
+              <a:srgbClr val="111827"/>
             </a:solidFill>
           </a:ln>
         </p:spPr>
@@ -11420,13 +11654,247 @@
       </p:sp>
       <p:sp>
         <p:nvSpPr>
-          <p:cNvPr id="13" name="example_1_icon_doc"/>
+          <p:cNvPr id="19" name="example_2_icon_line_0"/>
           <p:cNvSpPr/>
           <p:nvPr/>
         </p:nvSpPr>
         <p:spPr>
           <a:xfrm>
-            <a:off x="4480559" y="1517904"/>
+            <a:off x="8209483" y="1613001"/>
+            <a:ext cx="148590" cy="20802"/>
+          </a:xfrm>
+          <a:prstGeom prst="rect">
+            <a:avLst/>
+          </a:prstGeom>
+          <a:solidFill>
+            <a:srgbClr val="F7F2EA"/>
+          </a:solidFill>
+          <a:ln>
+            <a:solidFill>
+              <a:srgbClr val="F7F2EA"/>
+            </a:solidFill>
+          </a:ln>
+        </p:spPr>
+        <p:style>
+          <a:lnRef idx="1">
+            <a:schemeClr val="accent1"/>
+          </a:lnRef>
+          <a:fillRef idx="3">
+            <a:schemeClr val="accent1"/>
+          </a:fillRef>
+          <a:effectRef idx="2">
+            <a:schemeClr val="accent1"/>
+          </a:effectRef>
+          <a:fontRef idx="minor">
+            <a:schemeClr val="lt1"/>
+          </a:fontRef>
+        </p:style>
+        <p:txBody>
+          <a:bodyPr rtlCol="0" anchor="ctr"/>
+          <a:lstStyle/>
+          <a:p>
+            <a:pPr algn="ctr"/>
+          </a:p>
+        </p:txBody>
+      </p:sp>
+      <p:sp>
+        <p:nvSpPr>
+          <p:cNvPr id="20" name="example_2_icon_line_1"/>
+          <p:cNvSpPr/>
+          <p:nvPr/>
+        </p:nvSpPr>
+        <p:spPr>
+          <a:xfrm>
+            <a:off x="8209483" y="1690268"/>
+            <a:ext cx="148590" cy="20802"/>
+          </a:xfrm>
+          <a:prstGeom prst="rect">
+            <a:avLst/>
+          </a:prstGeom>
+          <a:solidFill>
+            <a:srgbClr val="F7F2EA"/>
+          </a:solidFill>
+          <a:ln>
+            <a:solidFill>
+              <a:srgbClr val="F7F2EA"/>
+            </a:solidFill>
+          </a:ln>
+        </p:spPr>
+        <p:style>
+          <a:lnRef idx="1">
+            <a:schemeClr val="accent1"/>
+          </a:lnRef>
+          <a:fillRef idx="3">
+            <a:schemeClr val="accent1"/>
+          </a:fillRef>
+          <a:effectRef idx="2">
+            <a:schemeClr val="accent1"/>
+          </a:effectRef>
+          <a:fontRef idx="minor">
+            <a:schemeClr val="lt1"/>
+          </a:fontRef>
+        </p:style>
+        <p:txBody>
+          <a:bodyPr rtlCol="0" anchor="ctr"/>
+          <a:lstStyle/>
+          <a:p>
+            <a:pPr algn="ctr"/>
+          </a:p>
+        </p:txBody>
+      </p:sp>
+      <p:sp>
+        <p:nvSpPr>
+          <p:cNvPr id="21" name="example_2_icon_line_2"/>
+          <p:cNvSpPr/>
+          <p:nvPr/>
+        </p:nvSpPr>
+        <p:spPr>
+          <a:xfrm>
+            <a:off x="8209483" y="1767535"/>
+            <a:ext cx="148590" cy="20802"/>
+          </a:xfrm>
+          <a:prstGeom prst="rect">
+            <a:avLst/>
+          </a:prstGeom>
+          <a:solidFill>
+            <a:srgbClr val="F7F2EA"/>
+          </a:solidFill>
+          <a:ln>
+            <a:solidFill>
+              <a:srgbClr val="F7F2EA"/>
+            </a:solidFill>
+          </a:ln>
+        </p:spPr>
+        <p:style>
+          <a:lnRef idx="1">
+            <a:schemeClr val="accent1"/>
+          </a:lnRef>
+          <a:fillRef idx="3">
+            <a:schemeClr val="accent1"/>
+          </a:fillRef>
+          <a:effectRef idx="2">
+            <a:schemeClr val="accent1"/>
+          </a:effectRef>
+          <a:fontRef idx="minor">
+            <a:schemeClr val="lt1"/>
+          </a:fontRef>
+        </p:style>
+        <p:txBody>
+          <a:bodyPr rtlCol="0" anchor="ctr"/>
+          <a:lstStyle/>
+          <a:p>
+            <a:pPr algn="ctr"/>
+          </a:p>
+        </p:txBody>
+      </p:sp>
+      <p:sp>
+        <p:nvSpPr>
+          <p:cNvPr id="22" name="example_2_title"/>
+          <p:cNvSpPr txBox="1"/>
+          <p:nvPr/>
+        </p:nvSpPr>
+        <p:spPr>
+          <a:xfrm>
+            <a:off x="8778240" y="1536192"/>
+            <a:ext cx="2167128" cy="347472"/>
+          </a:xfrm>
+          <a:prstGeom prst="rect">
+            <a:avLst/>
+          </a:prstGeom>
+          <a:noFill/>
+        </p:spPr>
+        <p:txBody>
+          <a:bodyPr wrap="square" anchor="ctr" lIns="0" rIns="0" tIns="0" bIns="0">
+            <a:spAutoFit/>
+          </a:bodyPr>
+          <a:lstStyle/>
+          <a:p>
+            <a:r>
+              <a:rPr sz="1800" b="1">
+                <a:solidFill>
+                  <a:srgbClr val="0F766E"/>
+                </a:solidFill>
+              </a:rPr>
+              <a:t>Pipeline</a:t>
+            </a:r>
+          </a:p>
+        </p:txBody>
+      </p:sp>
+      <p:sp>
+        <p:nvSpPr>
+          <p:cNvPr id="23" name="example_2_body_0"/>
+          <p:cNvSpPr txBox="1"/>
+          <p:nvPr/>
+        </p:nvSpPr>
+        <p:spPr>
+          <a:xfrm>
+            <a:off x="8778240" y="1993391"/>
+            <a:ext cx="2167128" cy="310896"/>
+          </a:xfrm>
+          <a:prstGeom prst="rect">
+            <a:avLst/>
+          </a:prstGeom>
+          <a:noFill/>
+        </p:spPr>
+        <p:txBody>
+          <a:bodyPr wrap="square" anchor="ctr" lIns="0" rIns="0" tIns="0" bIns="0">
+            <a:spAutoFit/>
+          </a:bodyPr>
+          <a:lstStyle/>
+          <a:p>
+            <a:r>
+              <a:rPr sz="1600" b="0">
+                <a:solidFill>
+                  <a:srgbClr val="5F6B7A"/>
+                </a:solidFill>
+              </a:rPr>
+              <a:t>Pipeline Example</a:t>
+            </a:r>
+          </a:p>
+        </p:txBody>
+      </p:sp>
+      <p:sp>
+        <p:nvSpPr>
+          <p:cNvPr id="24" name="example_2_body_1"/>
+          <p:cNvSpPr txBox="1"/>
+          <p:nvPr/>
+        </p:nvSpPr>
+        <p:spPr>
+          <a:xfrm>
+            <a:off x="8778240" y="2377439"/>
+            <a:ext cx="2167128" cy="310896"/>
+          </a:xfrm>
+          <a:prstGeom prst="rect">
+            <a:avLst/>
+          </a:prstGeom>
+          <a:noFill/>
+        </p:spPr>
+        <p:txBody>
+          <a:bodyPr wrap="square" anchor="ctr" lIns="0" rIns="0" tIns="0" bIns="0">
+            <a:spAutoFit/>
+          </a:bodyPr>
+          <a:lstStyle/>
+          <a:p>
+            <a:r>
+              <a:rPr sz="1600" b="0">
+                <a:solidFill>
+                  <a:srgbClr val="5F6B7A"/>
+                </a:solidFill>
+              </a:rPr>
+              <a:t>3 headings · 186 chars</a:t>
+            </a:r>
+          </a:p>
+        </p:txBody>
+      </p:sp>
+      <p:sp>
+        <p:nvSpPr>
+          <p:cNvPr id="25" name="example_3_icon_doc"/>
+          <p:cNvSpPr/>
+          <p:nvPr/>
+        </p:nvSpPr>
+        <p:spPr>
+          <a:xfrm>
+            <a:off x="822959" y="3575304"/>
             <a:ext cx="285292" cy="368503"/>
           </a:xfrm>
           <a:prstGeom prst="roundRect">
@@ -11465,13 +11933,13 @@
       </p:sp>
       <p:sp>
         <p:nvSpPr>
-          <p:cNvPr id="14" name="example_1_icon_line_0"/>
+          <p:cNvPr id="26" name="example_3_icon_line_0"/>
           <p:cNvSpPr/>
           <p:nvPr/>
         </p:nvSpPr>
         <p:spPr>
           <a:xfrm>
-            <a:off x="4551883" y="1613001"/>
+            <a:off x="894283" y="3670401"/>
             <a:ext cx="148590" cy="20802"/>
           </a:xfrm>
           <a:prstGeom prst="rect">
@@ -11510,13 +11978,13 @@
       </p:sp>
       <p:sp>
         <p:nvSpPr>
-          <p:cNvPr id="15" name="example_1_icon_line_1"/>
+          <p:cNvPr id="27" name="example_3_icon_line_1"/>
           <p:cNvSpPr/>
           <p:nvPr/>
         </p:nvSpPr>
         <p:spPr>
           <a:xfrm>
-            <a:off x="4551883" y="1690268"/>
+            <a:off x="894283" y="3747668"/>
             <a:ext cx="148590" cy="20802"/>
           </a:xfrm>
           <a:prstGeom prst="rect">
@@ -11555,13 +12023,13 @@
       </p:sp>
       <p:sp>
         <p:nvSpPr>
-          <p:cNvPr id="16" name="example_1_icon_line_2"/>
+          <p:cNvPr id="28" name="example_3_icon_line_2"/>
           <p:cNvSpPr/>
           <p:nvPr/>
         </p:nvSpPr>
         <p:spPr>
           <a:xfrm>
-            <a:off x="4551883" y="1767535"/>
+            <a:off x="894283" y="3824935"/>
             <a:ext cx="148590" cy="20802"/>
           </a:xfrm>
           <a:prstGeom prst="rect">
@@ -11600,13 +12068,13 @@
       </p:sp>
       <p:sp>
         <p:nvSpPr>
-          <p:cNvPr id="17" name="example_1_title"/>
+          <p:cNvPr id="29" name="example_3_title"/>
           <p:cNvSpPr txBox="1"/>
           <p:nvPr/>
         </p:nvSpPr>
         <p:spPr>
           <a:xfrm>
-            <a:off x="5120640" y="1536192"/>
+            <a:off x="1463040" y="3593592"/>
             <a:ext cx="2167128" cy="347472"/>
           </a:xfrm>
           <a:prstGeom prst="rect">
@@ -11626,20 +12094,20 @@
                   <a:srgbClr val="7C3AED"/>
                 </a:solidFill>
               </a:rPr>
-              <a:t>Comparison</a:t>
-            </a:r>
-          </a:p>
-        </p:txBody>
-      </p:sp>
-      <p:sp>
-        <p:nvSpPr>
-          <p:cNvPr id="18" name="example_1_body_0"/>
+              <a:t>Diagram</a:t>
+            </a:r>
+          </a:p>
+        </p:txBody>
+      </p:sp>
+      <p:sp>
+        <p:nvSpPr>
+          <p:cNvPr id="30" name="example_3_body_0"/>
           <p:cNvSpPr txBox="1"/>
           <p:nvPr/>
         </p:nvSpPr>
         <p:spPr>
           <a:xfrm>
-            <a:off x="5120640" y="1993391"/>
+            <a:off x="1463040" y="4050791"/>
             <a:ext cx="2167128" cy="310896"/>
           </a:xfrm>
           <a:prstGeom prst="rect">
@@ -11659,20 +12127,20 @@
                   <a:srgbClr val="5F6B7A"/>
                 </a:solidFill>
               </a:rPr>
-              <a:t>Comparison Structure Example</a:t>
-            </a:r>
-          </a:p>
-        </p:txBody>
-      </p:sp>
-      <p:sp>
-        <p:nvSpPr>
-          <p:cNvPr id="19" name="example_1_body_1"/>
+              <a:t>Diagram Arrangement Examples</a:t>
+            </a:r>
+          </a:p>
+        </p:txBody>
+      </p:sp>
+      <p:sp>
+        <p:nvSpPr>
+          <p:cNvPr id="31" name="example_3_body_1"/>
           <p:cNvSpPr txBox="1"/>
           <p:nvPr/>
         </p:nvSpPr>
         <p:spPr>
           <a:xfrm>
-            <a:off x="5120640" y="2377439"/>
+            <a:off x="1463040" y="4434840"/>
             <a:ext cx="2167128" cy="310896"/>
           </a:xfrm>
           <a:prstGeom prst="rect">
@@ -11692,31 +12160,31 @@
                   <a:srgbClr val="5F6B7A"/>
                 </a:solidFill>
               </a:rPr>
-              <a:t>4 headings · 307 chars</a:t>
-            </a:r>
-          </a:p>
-        </p:txBody>
-      </p:sp>
-      <p:sp>
-        <p:nvSpPr>
-          <p:cNvPr id="20" name="example_2_card"/>
+              <a:t>6 headings · 457 chars</a:t>
+            </a:r>
+          </a:p>
+        </p:txBody>
+      </p:sp>
+      <p:sp>
+        <p:nvSpPr>
+          <p:cNvPr id="32" name="example_4_icon_doc"/>
           <p:cNvSpPr/>
           <p:nvPr/>
         </p:nvSpPr>
         <p:spPr>
           <a:xfrm>
-            <a:off x="7973568" y="1353312"/>
-            <a:ext cx="3154680" cy="1737360"/>
+            <a:off x="4480559" y="3575304"/>
+            <a:ext cx="285292" cy="368503"/>
           </a:xfrm>
           <a:prstGeom prst="roundRect">
             <a:avLst/>
           </a:prstGeom>
           <a:solidFill>
-            <a:srgbClr val="FFFDF8"/>
+            <a:srgbClr val="111827"/>
           </a:solidFill>
           <a:ln>
             <a:solidFill>
-              <a:srgbClr val="D7CDBD"/>
+              <a:srgbClr val="111827"/>
             </a:solidFill>
           </a:ln>
         </p:spPr>
@@ -11744,13 +12212,247 @@
       </p:sp>
       <p:sp>
         <p:nvSpPr>
-          <p:cNvPr id="21" name="example_2_icon_doc"/>
+          <p:cNvPr id="33" name="example_4_icon_line_0"/>
           <p:cNvSpPr/>
           <p:nvPr/>
         </p:nvSpPr>
         <p:spPr>
           <a:xfrm>
-            <a:off x="8138160" y="1517904"/>
+            <a:off x="4551883" y="3670401"/>
+            <a:ext cx="148590" cy="20802"/>
+          </a:xfrm>
+          <a:prstGeom prst="rect">
+            <a:avLst/>
+          </a:prstGeom>
+          <a:solidFill>
+            <a:srgbClr val="F7F2EA"/>
+          </a:solidFill>
+          <a:ln>
+            <a:solidFill>
+              <a:srgbClr val="F7F2EA"/>
+            </a:solidFill>
+          </a:ln>
+        </p:spPr>
+        <p:style>
+          <a:lnRef idx="1">
+            <a:schemeClr val="accent1"/>
+          </a:lnRef>
+          <a:fillRef idx="3">
+            <a:schemeClr val="accent1"/>
+          </a:fillRef>
+          <a:effectRef idx="2">
+            <a:schemeClr val="accent1"/>
+          </a:effectRef>
+          <a:fontRef idx="minor">
+            <a:schemeClr val="lt1"/>
+          </a:fontRef>
+        </p:style>
+        <p:txBody>
+          <a:bodyPr rtlCol="0" anchor="ctr"/>
+          <a:lstStyle/>
+          <a:p>
+            <a:pPr algn="ctr"/>
+          </a:p>
+        </p:txBody>
+      </p:sp>
+      <p:sp>
+        <p:nvSpPr>
+          <p:cNvPr id="34" name="example_4_icon_line_1"/>
+          <p:cNvSpPr/>
+          <p:nvPr/>
+        </p:nvSpPr>
+        <p:spPr>
+          <a:xfrm>
+            <a:off x="4551883" y="3747668"/>
+            <a:ext cx="148590" cy="20802"/>
+          </a:xfrm>
+          <a:prstGeom prst="rect">
+            <a:avLst/>
+          </a:prstGeom>
+          <a:solidFill>
+            <a:srgbClr val="F7F2EA"/>
+          </a:solidFill>
+          <a:ln>
+            <a:solidFill>
+              <a:srgbClr val="F7F2EA"/>
+            </a:solidFill>
+          </a:ln>
+        </p:spPr>
+        <p:style>
+          <a:lnRef idx="1">
+            <a:schemeClr val="accent1"/>
+          </a:lnRef>
+          <a:fillRef idx="3">
+            <a:schemeClr val="accent1"/>
+          </a:fillRef>
+          <a:effectRef idx="2">
+            <a:schemeClr val="accent1"/>
+          </a:effectRef>
+          <a:fontRef idx="minor">
+            <a:schemeClr val="lt1"/>
+          </a:fontRef>
+        </p:style>
+        <p:txBody>
+          <a:bodyPr rtlCol="0" anchor="ctr"/>
+          <a:lstStyle/>
+          <a:p>
+            <a:pPr algn="ctr"/>
+          </a:p>
+        </p:txBody>
+      </p:sp>
+      <p:sp>
+        <p:nvSpPr>
+          <p:cNvPr id="35" name="example_4_icon_line_2"/>
+          <p:cNvSpPr/>
+          <p:nvPr/>
+        </p:nvSpPr>
+        <p:spPr>
+          <a:xfrm>
+            <a:off x="4551883" y="3824935"/>
+            <a:ext cx="148590" cy="20802"/>
+          </a:xfrm>
+          <a:prstGeom prst="rect">
+            <a:avLst/>
+          </a:prstGeom>
+          <a:solidFill>
+            <a:srgbClr val="F7F2EA"/>
+          </a:solidFill>
+          <a:ln>
+            <a:solidFill>
+              <a:srgbClr val="F7F2EA"/>
+            </a:solidFill>
+          </a:ln>
+        </p:spPr>
+        <p:style>
+          <a:lnRef idx="1">
+            <a:schemeClr val="accent1"/>
+          </a:lnRef>
+          <a:fillRef idx="3">
+            <a:schemeClr val="accent1"/>
+          </a:fillRef>
+          <a:effectRef idx="2">
+            <a:schemeClr val="accent1"/>
+          </a:effectRef>
+          <a:fontRef idx="minor">
+            <a:schemeClr val="lt1"/>
+          </a:fontRef>
+        </p:style>
+        <p:txBody>
+          <a:bodyPr rtlCol="0" anchor="ctr"/>
+          <a:lstStyle/>
+          <a:p>
+            <a:pPr algn="ctr"/>
+          </a:p>
+        </p:txBody>
+      </p:sp>
+      <p:sp>
+        <p:nvSpPr>
+          <p:cNvPr id="36" name="example_4_title"/>
+          <p:cNvSpPr txBox="1"/>
+          <p:nvPr/>
+        </p:nvSpPr>
+        <p:spPr>
+          <a:xfrm>
+            <a:off x="5120640" y="3593592"/>
+            <a:ext cx="2167128" cy="347472"/>
+          </a:xfrm>
+          <a:prstGeom prst="rect">
+            <a:avLst/>
+          </a:prstGeom>
+          <a:noFill/>
+        </p:spPr>
+        <p:txBody>
+          <a:bodyPr wrap="square" anchor="ctr" lIns="0" rIns="0" tIns="0" bIns="0">
+            <a:spAutoFit/>
+          </a:bodyPr>
+          <a:lstStyle/>
+          <a:p>
+            <a:r>
+              <a:rPr sz="1800" b="1">
+                <a:solidFill>
+                  <a:srgbClr val="0F766E"/>
+                </a:solidFill>
+              </a:rPr>
+              <a:t>Five Methods</a:t>
+            </a:r>
+          </a:p>
+        </p:txBody>
+      </p:sp>
+      <p:sp>
+        <p:nvSpPr>
+          <p:cNvPr id="37" name="example_4_body_0"/>
+          <p:cNvSpPr txBox="1"/>
+          <p:nvPr/>
+        </p:nvSpPr>
+        <p:spPr>
+          <a:xfrm>
+            <a:off x="5120640" y="4050791"/>
+            <a:ext cx="2167128" cy="310896"/>
+          </a:xfrm>
+          <a:prstGeom prst="rect">
+            <a:avLst/>
+          </a:prstGeom>
+          <a:noFill/>
+        </p:spPr>
+        <p:txBody>
+          <a:bodyPr wrap="square" anchor="ctr" lIns="0" rIns="0" tIns="0" bIns="0">
+            <a:spAutoFit/>
+          </a:bodyPr>
+          <a:lstStyle/>
+          <a:p>
+            <a:r>
+              <a:rPr sz="1600" b="0">
+                <a:solidFill>
+                  <a:srgbClr val="5F6B7A"/>
+                </a:solidFill>
+              </a:rPr>
+              <a:t>Five-Item Layout Example</a:t>
+            </a:r>
+          </a:p>
+        </p:txBody>
+      </p:sp>
+      <p:sp>
+        <p:nvSpPr>
+          <p:cNvPr id="38" name="example_4_body_1"/>
+          <p:cNvSpPr txBox="1"/>
+          <p:nvPr/>
+        </p:nvSpPr>
+        <p:spPr>
+          <a:xfrm>
+            <a:off x="5120640" y="4434840"/>
+            <a:ext cx="2167128" cy="310896"/>
+          </a:xfrm>
+          <a:prstGeom prst="rect">
+            <a:avLst/>
+          </a:prstGeom>
+          <a:noFill/>
+        </p:spPr>
+        <p:txBody>
+          <a:bodyPr wrap="square" anchor="ctr" lIns="0" rIns="0" tIns="0" bIns="0">
+            <a:spAutoFit/>
+          </a:bodyPr>
+          <a:lstStyle/>
+          <a:p>
+            <a:r>
+              <a:rPr sz="1600" b="0">
+                <a:solidFill>
+                  <a:srgbClr val="5F6B7A"/>
+                </a:solidFill>
+              </a:rPr>
+              <a:t>2 headings · 200 chars</a:t>
+            </a:r>
+          </a:p>
+        </p:txBody>
+      </p:sp>
+      <p:sp>
+        <p:nvSpPr>
+          <p:cNvPr id="39" name="example_5_icon_doc"/>
+          <p:cNvSpPr/>
+          <p:nvPr/>
+        </p:nvSpPr>
+        <p:spPr>
+          <a:xfrm>
+            <a:off x="8138160" y="3575304"/>
             <a:ext cx="285292" cy="368503"/>
           </a:xfrm>
           <a:prstGeom prst="roundRect">
@@ -11789,13 +12491,13 @@
       </p:sp>
       <p:sp>
         <p:nvSpPr>
-          <p:cNvPr id="22" name="example_2_icon_line_0"/>
+          <p:cNvPr id="40" name="example_5_icon_line_0"/>
           <p:cNvSpPr/>
           <p:nvPr/>
         </p:nvSpPr>
         <p:spPr>
           <a:xfrm>
-            <a:off x="8209483" y="1613001"/>
+            <a:off x="8209483" y="3670401"/>
             <a:ext cx="148590" cy="20802"/>
           </a:xfrm>
           <a:prstGeom prst="rect">
@@ -11834,13 +12536,13 @@
       </p:sp>
       <p:sp>
         <p:nvSpPr>
-          <p:cNvPr id="23" name="example_2_icon_line_1"/>
+          <p:cNvPr id="41" name="example_5_icon_line_1"/>
           <p:cNvSpPr/>
           <p:nvPr/>
         </p:nvSpPr>
         <p:spPr>
           <a:xfrm>
-            <a:off x="8209483" y="1690268"/>
+            <a:off x="8209483" y="3747668"/>
             <a:ext cx="148590" cy="20802"/>
           </a:xfrm>
           <a:prstGeom prst="rect">
@@ -11879,13 +12581,13 @@
       </p:sp>
       <p:sp>
         <p:nvSpPr>
-          <p:cNvPr id="24" name="example_2_icon_line_2"/>
+          <p:cNvPr id="42" name="example_5_icon_line_2"/>
           <p:cNvSpPr/>
           <p:nvPr/>
         </p:nvSpPr>
         <p:spPr>
           <a:xfrm>
-            <a:off x="8209483" y="1767535"/>
+            <a:off x="8209483" y="3824935"/>
             <a:ext cx="148590" cy="20802"/>
           </a:xfrm>
           <a:prstGeom prst="rect">
@@ -11924,13 +12626,13 @@
       </p:sp>
       <p:sp>
         <p:nvSpPr>
-          <p:cNvPr id="25" name="example_2_title"/>
+          <p:cNvPr id="43" name="example_5_title"/>
           <p:cNvSpPr txBox="1"/>
           <p:nvPr/>
         </p:nvSpPr>
         <p:spPr>
           <a:xfrm>
-            <a:off x="8778240" y="1536192"/>
+            <a:off x="8778240" y="3593592"/>
             <a:ext cx="2167128" cy="347472"/>
           </a:xfrm>
           <a:prstGeom prst="rect">
@@ -11947,23 +12649,23 @@
             <a:r>
               <a:rPr sz="1800" b="1">
                 <a:solidFill>
-                  <a:srgbClr val="0F766E"/>
+                  <a:srgbClr val="7C3AED"/>
                 </a:solidFill>
               </a:rPr>
-              <a:t>Pipeline</a:t>
-            </a:r>
-          </a:p>
-        </p:txBody>
-      </p:sp>
-      <p:sp>
-        <p:nvSpPr>
-          <p:cNvPr id="26" name="example_2_body_0"/>
+              <a:t>Theme Preview</a:t>
+            </a:r>
+          </a:p>
+        </p:txBody>
+      </p:sp>
+      <p:sp>
+        <p:nvSpPr>
+          <p:cNvPr id="44" name="example_5_body_0"/>
           <p:cNvSpPr txBox="1"/>
           <p:nvPr/>
         </p:nvSpPr>
         <p:spPr>
           <a:xfrm>
-            <a:off x="8778240" y="1993391"/>
+            <a:off x="8778240" y="4050791"/>
             <a:ext cx="2167128" cy="310896"/>
           </a:xfrm>
           <a:prstGeom prst="rect">
@@ -11983,978 +12685,6 @@
                   <a:srgbClr val="5F6B7A"/>
                 </a:solidFill>
               </a:rPr>
-              <a:t>Pipeline Example</a:t>
-            </a:r>
-          </a:p>
-        </p:txBody>
-      </p:sp>
-      <p:sp>
-        <p:nvSpPr>
-          <p:cNvPr id="27" name="example_2_body_1"/>
-          <p:cNvSpPr txBox="1"/>
-          <p:nvPr/>
-        </p:nvSpPr>
-        <p:spPr>
-          <a:xfrm>
-            <a:off x="8778240" y="2377439"/>
-            <a:ext cx="2167128" cy="310896"/>
-          </a:xfrm>
-          <a:prstGeom prst="rect">
-            <a:avLst/>
-          </a:prstGeom>
-          <a:noFill/>
-        </p:spPr>
-        <p:txBody>
-          <a:bodyPr wrap="square" anchor="ctr" lIns="0" rIns="0" tIns="0" bIns="0">
-            <a:spAutoFit/>
-          </a:bodyPr>
-          <a:lstStyle/>
-          <a:p>
-            <a:r>
-              <a:rPr sz="1600" b="0">
-                <a:solidFill>
-                  <a:srgbClr val="5F6B7A"/>
-                </a:solidFill>
-              </a:rPr>
-              <a:t>3 headings · 186 chars</a:t>
-            </a:r>
-          </a:p>
-        </p:txBody>
-      </p:sp>
-      <p:sp>
-        <p:nvSpPr>
-          <p:cNvPr id="28" name="example_3_card"/>
-          <p:cNvSpPr/>
-          <p:nvPr/>
-        </p:nvSpPr>
-        <p:spPr>
-          <a:xfrm>
-            <a:off x="658368" y="3410712"/>
-            <a:ext cx="3154680" cy="1737360"/>
-          </a:xfrm>
-          <a:prstGeom prst="roundRect">
-            <a:avLst/>
-          </a:prstGeom>
-          <a:solidFill>
-            <a:srgbClr val="FFFDF8"/>
-          </a:solidFill>
-          <a:ln>
-            <a:solidFill>
-              <a:srgbClr val="D7CDBD"/>
-            </a:solidFill>
-          </a:ln>
-        </p:spPr>
-        <p:style>
-          <a:lnRef idx="1">
-            <a:schemeClr val="accent1"/>
-          </a:lnRef>
-          <a:fillRef idx="3">
-            <a:schemeClr val="accent1"/>
-          </a:fillRef>
-          <a:effectRef idx="2">
-            <a:schemeClr val="accent1"/>
-          </a:effectRef>
-          <a:fontRef idx="minor">
-            <a:schemeClr val="lt1"/>
-          </a:fontRef>
-        </p:style>
-        <p:txBody>
-          <a:bodyPr rtlCol="0" anchor="ctr"/>
-          <a:lstStyle/>
-          <a:p>
-            <a:pPr algn="ctr"/>
-          </a:p>
-        </p:txBody>
-      </p:sp>
-      <p:sp>
-        <p:nvSpPr>
-          <p:cNvPr id="29" name="example_3_icon_doc"/>
-          <p:cNvSpPr/>
-          <p:nvPr/>
-        </p:nvSpPr>
-        <p:spPr>
-          <a:xfrm>
-            <a:off x="822959" y="3575304"/>
-            <a:ext cx="285292" cy="368503"/>
-          </a:xfrm>
-          <a:prstGeom prst="roundRect">
-            <a:avLst/>
-          </a:prstGeom>
-          <a:solidFill>
-            <a:srgbClr val="111827"/>
-          </a:solidFill>
-          <a:ln>
-            <a:solidFill>
-              <a:srgbClr val="111827"/>
-            </a:solidFill>
-          </a:ln>
-        </p:spPr>
-        <p:style>
-          <a:lnRef idx="1">
-            <a:schemeClr val="accent1"/>
-          </a:lnRef>
-          <a:fillRef idx="3">
-            <a:schemeClr val="accent1"/>
-          </a:fillRef>
-          <a:effectRef idx="2">
-            <a:schemeClr val="accent1"/>
-          </a:effectRef>
-          <a:fontRef idx="minor">
-            <a:schemeClr val="lt1"/>
-          </a:fontRef>
-        </p:style>
-        <p:txBody>
-          <a:bodyPr rtlCol="0" anchor="ctr"/>
-          <a:lstStyle/>
-          <a:p>
-            <a:pPr algn="ctr"/>
-          </a:p>
-        </p:txBody>
-      </p:sp>
-      <p:sp>
-        <p:nvSpPr>
-          <p:cNvPr id="30" name="example_3_icon_line_0"/>
-          <p:cNvSpPr/>
-          <p:nvPr/>
-        </p:nvSpPr>
-        <p:spPr>
-          <a:xfrm>
-            <a:off x="894283" y="3670401"/>
-            <a:ext cx="148590" cy="20802"/>
-          </a:xfrm>
-          <a:prstGeom prst="rect">
-            <a:avLst/>
-          </a:prstGeom>
-          <a:solidFill>
-            <a:srgbClr val="F7F2EA"/>
-          </a:solidFill>
-          <a:ln>
-            <a:solidFill>
-              <a:srgbClr val="F7F2EA"/>
-            </a:solidFill>
-          </a:ln>
-        </p:spPr>
-        <p:style>
-          <a:lnRef idx="1">
-            <a:schemeClr val="accent1"/>
-          </a:lnRef>
-          <a:fillRef idx="3">
-            <a:schemeClr val="accent1"/>
-          </a:fillRef>
-          <a:effectRef idx="2">
-            <a:schemeClr val="accent1"/>
-          </a:effectRef>
-          <a:fontRef idx="minor">
-            <a:schemeClr val="lt1"/>
-          </a:fontRef>
-        </p:style>
-        <p:txBody>
-          <a:bodyPr rtlCol="0" anchor="ctr"/>
-          <a:lstStyle/>
-          <a:p>
-            <a:pPr algn="ctr"/>
-          </a:p>
-        </p:txBody>
-      </p:sp>
-      <p:sp>
-        <p:nvSpPr>
-          <p:cNvPr id="31" name="example_3_icon_line_1"/>
-          <p:cNvSpPr/>
-          <p:nvPr/>
-        </p:nvSpPr>
-        <p:spPr>
-          <a:xfrm>
-            <a:off x="894283" y="3747668"/>
-            <a:ext cx="148590" cy="20802"/>
-          </a:xfrm>
-          <a:prstGeom prst="rect">
-            <a:avLst/>
-          </a:prstGeom>
-          <a:solidFill>
-            <a:srgbClr val="F7F2EA"/>
-          </a:solidFill>
-          <a:ln>
-            <a:solidFill>
-              <a:srgbClr val="F7F2EA"/>
-            </a:solidFill>
-          </a:ln>
-        </p:spPr>
-        <p:style>
-          <a:lnRef idx="1">
-            <a:schemeClr val="accent1"/>
-          </a:lnRef>
-          <a:fillRef idx="3">
-            <a:schemeClr val="accent1"/>
-          </a:fillRef>
-          <a:effectRef idx="2">
-            <a:schemeClr val="accent1"/>
-          </a:effectRef>
-          <a:fontRef idx="minor">
-            <a:schemeClr val="lt1"/>
-          </a:fontRef>
-        </p:style>
-        <p:txBody>
-          <a:bodyPr rtlCol="0" anchor="ctr"/>
-          <a:lstStyle/>
-          <a:p>
-            <a:pPr algn="ctr"/>
-          </a:p>
-        </p:txBody>
-      </p:sp>
-      <p:sp>
-        <p:nvSpPr>
-          <p:cNvPr id="32" name="example_3_icon_line_2"/>
-          <p:cNvSpPr/>
-          <p:nvPr/>
-        </p:nvSpPr>
-        <p:spPr>
-          <a:xfrm>
-            <a:off x="894283" y="3824935"/>
-            <a:ext cx="148590" cy="20802"/>
-          </a:xfrm>
-          <a:prstGeom prst="rect">
-            <a:avLst/>
-          </a:prstGeom>
-          <a:solidFill>
-            <a:srgbClr val="F7F2EA"/>
-          </a:solidFill>
-          <a:ln>
-            <a:solidFill>
-              <a:srgbClr val="F7F2EA"/>
-            </a:solidFill>
-          </a:ln>
-        </p:spPr>
-        <p:style>
-          <a:lnRef idx="1">
-            <a:schemeClr val="accent1"/>
-          </a:lnRef>
-          <a:fillRef idx="3">
-            <a:schemeClr val="accent1"/>
-          </a:fillRef>
-          <a:effectRef idx="2">
-            <a:schemeClr val="accent1"/>
-          </a:effectRef>
-          <a:fontRef idx="minor">
-            <a:schemeClr val="lt1"/>
-          </a:fontRef>
-        </p:style>
-        <p:txBody>
-          <a:bodyPr rtlCol="0" anchor="ctr"/>
-          <a:lstStyle/>
-          <a:p>
-            <a:pPr algn="ctr"/>
-          </a:p>
-        </p:txBody>
-      </p:sp>
-      <p:sp>
-        <p:nvSpPr>
-          <p:cNvPr id="33" name="example_3_title"/>
-          <p:cNvSpPr txBox="1"/>
-          <p:nvPr/>
-        </p:nvSpPr>
-        <p:spPr>
-          <a:xfrm>
-            <a:off x="1463040" y="3593592"/>
-            <a:ext cx="2167128" cy="347472"/>
-          </a:xfrm>
-          <a:prstGeom prst="rect">
-            <a:avLst/>
-          </a:prstGeom>
-          <a:noFill/>
-        </p:spPr>
-        <p:txBody>
-          <a:bodyPr wrap="square" anchor="ctr" lIns="0" rIns="0" tIns="0" bIns="0">
-            <a:spAutoFit/>
-          </a:bodyPr>
-          <a:lstStyle/>
-          <a:p>
-            <a:r>
-              <a:rPr sz="1800" b="1">
-                <a:solidFill>
-                  <a:srgbClr val="7C3AED"/>
-                </a:solidFill>
-              </a:rPr>
-              <a:t>Diagram</a:t>
-            </a:r>
-          </a:p>
-        </p:txBody>
-      </p:sp>
-      <p:sp>
-        <p:nvSpPr>
-          <p:cNvPr id="34" name="example_3_body_0"/>
-          <p:cNvSpPr txBox="1"/>
-          <p:nvPr/>
-        </p:nvSpPr>
-        <p:spPr>
-          <a:xfrm>
-            <a:off x="1463040" y="4050791"/>
-            <a:ext cx="2167128" cy="310896"/>
-          </a:xfrm>
-          <a:prstGeom prst="rect">
-            <a:avLst/>
-          </a:prstGeom>
-          <a:noFill/>
-        </p:spPr>
-        <p:txBody>
-          <a:bodyPr wrap="square" anchor="ctr" lIns="0" rIns="0" tIns="0" bIns="0">
-            <a:spAutoFit/>
-          </a:bodyPr>
-          <a:lstStyle/>
-          <a:p>
-            <a:r>
-              <a:rPr sz="1600" b="0">
-                <a:solidFill>
-                  <a:srgbClr val="5F6B7A"/>
-                </a:solidFill>
-              </a:rPr>
-              <a:t>Diagram Arrangement Examples</a:t>
-            </a:r>
-          </a:p>
-        </p:txBody>
-      </p:sp>
-      <p:sp>
-        <p:nvSpPr>
-          <p:cNvPr id="35" name="example_3_body_1"/>
-          <p:cNvSpPr txBox="1"/>
-          <p:nvPr/>
-        </p:nvSpPr>
-        <p:spPr>
-          <a:xfrm>
-            <a:off x="1463040" y="4434840"/>
-            <a:ext cx="2167128" cy="310896"/>
-          </a:xfrm>
-          <a:prstGeom prst="rect">
-            <a:avLst/>
-          </a:prstGeom>
-          <a:noFill/>
-        </p:spPr>
-        <p:txBody>
-          <a:bodyPr wrap="square" anchor="ctr" lIns="0" rIns="0" tIns="0" bIns="0">
-            <a:spAutoFit/>
-          </a:bodyPr>
-          <a:lstStyle/>
-          <a:p>
-            <a:r>
-              <a:rPr sz="1600" b="0">
-                <a:solidFill>
-                  <a:srgbClr val="5F6B7A"/>
-                </a:solidFill>
-              </a:rPr>
-              <a:t>6 headings · 457 chars</a:t>
-            </a:r>
-          </a:p>
-        </p:txBody>
-      </p:sp>
-      <p:sp>
-        <p:nvSpPr>
-          <p:cNvPr id="36" name="example_4_card"/>
-          <p:cNvSpPr/>
-          <p:nvPr/>
-        </p:nvSpPr>
-        <p:spPr>
-          <a:xfrm>
-            <a:off x="4315968" y="3410712"/>
-            <a:ext cx="3154680" cy="1737360"/>
-          </a:xfrm>
-          <a:prstGeom prst="roundRect">
-            <a:avLst/>
-          </a:prstGeom>
-          <a:solidFill>
-            <a:srgbClr val="FFFDF8"/>
-          </a:solidFill>
-          <a:ln>
-            <a:solidFill>
-              <a:srgbClr val="D7CDBD"/>
-            </a:solidFill>
-          </a:ln>
-        </p:spPr>
-        <p:style>
-          <a:lnRef idx="1">
-            <a:schemeClr val="accent1"/>
-          </a:lnRef>
-          <a:fillRef idx="3">
-            <a:schemeClr val="accent1"/>
-          </a:fillRef>
-          <a:effectRef idx="2">
-            <a:schemeClr val="accent1"/>
-          </a:effectRef>
-          <a:fontRef idx="minor">
-            <a:schemeClr val="lt1"/>
-          </a:fontRef>
-        </p:style>
-        <p:txBody>
-          <a:bodyPr rtlCol="0" anchor="ctr"/>
-          <a:lstStyle/>
-          <a:p>
-            <a:pPr algn="ctr"/>
-          </a:p>
-        </p:txBody>
-      </p:sp>
-      <p:sp>
-        <p:nvSpPr>
-          <p:cNvPr id="37" name="example_4_icon_doc"/>
-          <p:cNvSpPr/>
-          <p:nvPr/>
-        </p:nvSpPr>
-        <p:spPr>
-          <a:xfrm>
-            <a:off x="4480559" y="3575304"/>
-            <a:ext cx="285292" cy="368503"/>
-          </a:xfrm>
-          <a:prstGeom prst="roundRect">
-            <a:avLst/>
-          </a:prstGeom>
-          <a:solidFill>
-            <a:srgbClr val="111827"/>
-          </a:solidFill>
-          <a:ln>
-            <a:solidFill>
-              <a:srgbClr val="111827"/>
-            </a:solidFill>
-          </a:ln>
-        </p:spPr>
-        <p:style>
-          <a:lnRef idx="1">
-            <a:schemeClr val="accent1"/>
-          </a:lnRef>
-          <a:fillRef idx="3">
-            <a:schemeClr val="accent1"/>
-          </a:fillRef>
-          <a:effectRef idx="2">
-            <a:schemeClr val="accent1"/>
-          </a:effectRef>
-          <a:fontRef idx="minor">
-            <a:schemeClr val="lt1"/>
-          </a:fontRef>
-        </p:style>
-        <p:txBody>
-          <a:bodyPr rtlCol="0" anchor="ctr"/>
-          <a:lstStyle/>
-          <a:p>
-            <a:pPr algn="ctr"/>
-          </a:p>
-        </p:txBody>
-      </p:sp>
-      <p:sp>
-        <p:nvSpPr>
-          <p:cNvPr id="38" name="example_4_icon_line_0"/>
-          <p:cNvSpPr/>
-          <p:nvPr/>
-        </p:nvSpPr>
-        <p:spPr>
-          <a:xfrm>
-            <a:off x="4551883" y="3670401"/>
-            <a:ext cx="148590" cy="20802"/>
-          </a:xfrm>
-          <a:prstGeom prst="rect">
-            <a:avLst/>
-          </a:prstGeom>
-          <a:solidFill>
-            <a:srgbClr val="F7F2EA"/>
-          </a:solidFill>
-          <a:ln>
-            <a:solidFill>
-              <a:srgbClr val="F7F2EA"/>
-            </a:solidFill>
-          </a:ln>
-        </p:spPr>
-        <p:style>
-          <a:lnRef idx="1">
-            <a:schemeClr val="accent1"/>
-          </a:lnRef>
-          <a:fillRef idx="3">
-            <a:schemeClr val="accent1"/>
-          </a:fillRef>
-          <a:effectRef idx="2">
-            <a:schemeClr val="accent1"/>
-          </a:effectRef>
-          <a:fontRef idx="minor">
-            <a:schemeClr val="lt1"/>
-          </a:fontRef>
-        </p:style>
-        <p:txBody>
-          <a:bodyPr rtlCol="0" anchor="ctr"/>
-          <a:lstStyle/>
-          <a:p>
-            <a:pPr algn="ctr"/>
-          </a:p>
-        </p:txBody>
-      </p:sp>
-      <p:sp>
-        <p:nvSpPr>
-          <p:cNvPr id="39" name="example_4_icon_line_1"/>
-          <p:cNvSpPr/>
-          <p:nvPr/>
-        </p:nvSpPr>
-        <p:spPr>
-          <a:xfrm>
-            <a:off x="4551883" y="3747668"/>
-            <a:ext cx="148590" cy="20802"/>
-          </a:xfrm>
-          <a:prstGeom prst="rect">
-            <a:avLst/>
-          </a:prstGeom>
-          <a:solidFill>
-            <a:srgbClr val="F7F2EA"/>
-          </a:solidFill>
-          <a:ln>
-            <a:solidFill>
-              <a:srgbClr val="F7F2EA"/>
-            </a:solidFill>
-          </a:ln>
-        </p:spPr>
-        <p:style>
-          <a:lnRef idx="1">
-            <a:schemeClr val="accent1"/>
-          </a:lnRef>
-          <a:fillRef idx="3">
-            <a:schemeClr val="accent1"/>
-          </a:fillRef>
-          <a:effectRef idx="2">
-            <a:schemeClr val="accent1"/>
-          </a:effectRef>
-          <a:fontRef idx="minor">
-            <a:schemeClr val="lt1"/>
-          </a:fontRef>
-        </p:style>
-        <p:txBody>
-          <a:bodyPr rtlCol="0" anchor="ctr"/>
-          <a:lstStyle/>
-          <a:p>
-            <a:pPr algn="ctr"/>
-          </a:p>
-        </p:txBody>
-      </p:sp>
-      <p:sp>
-        <p:nvSpPr>
-          <p:cNvPr id="40" name="example_4_icon_line_2"/>
-          <p:cNvSpPr/>
-          <p:nvPr/>
-        </p:nvSpPr>
-        <p:spPr>
-          <a:xfrm>
-            <a:off x="4551883" y="3824935"/>
-            <a:ext cx="148590" cy="20802"/>
-          </a:xfrm>
-          <a:prstGeom prst="rect">
-            <a:avLst/>
-          </a:prstGeom>
-          <a:solidFill>
-            <a:srgbClr val="F7F2EA"/>
-          </a:solidFill>
-          <a:ln>
-            <a:solidFill>
-              <a:srgbClr val="F7F2EA"/>
-            </a:solidFill>
-          </a:ln>
-        </p:spPr>
-        <p:style>
-          <a:lnRef idx="1">
-            <a:schemeClr val="accent1"/>
-          </a:lnRef>
-          <a:fillRef idx="3">
-            <a:schemeClr val="accent1"/>
-          </a:fillRef>
-          <a:effectRef idx="2">
-            <a:schemeClr val="accent1"/>
-          </a:effectRef>
-          <a:fontRef idx="minor">
-            <a:schemeClr val="lt1"/>
-          </a:fontRef>
-        </p:style>
-        <p:txBody>
-          <a:bodyPr rtlCol="0" anchor="ctr"/>
-          <a:lstStyle/>
-          <a:p>
-            <a:pPr algn="ctr"/>
-          </a:p>
-        </p:txBody>
-      </p:sp>
-      <p:sp>
-        <p:nvSpPr>
-          <p:cNvPr id="41" name="example_4_title"/>
-          <p:cNvSpPr txBox="1"/>
-          <p:nvPr/>
-        </p:nvSpPr>
-        <p:spPr>
-          <a:xfrm>
-            <a:off x="5120640" y="3593592"/>
-            <a:ext cx="2167128" cy="347472"/>
-          </a:xfrm>
-          <a:prstGeom prst="rect">
-            <a:avLst/>
-          </a:prstGeom>
-          <a:noFill/>
-        </p:spPr>
-        <p:txBody>
-          <a:bodyPr wrap="square" anchor="ctr" lIns="0" rIns="0" tIns="0" bIns="0">
-            <a:spAutoFit/>
-          </a:bodyPr>
-          <a:lstStyle/>
-          <a:p>
-            <a:r>
-              <a:rPr sz="1800" b="1">
-                <a:solidFill>
-                  <a:srgbClr val="0F766E"/>
-                </a:solidFill>
-              </a:rPr>
-              <a:t>Five Methods</a:t>
-            </a:r>
-          </a:p>
-        </p:txBody>
-      </p:sp>
-      <p:sp>
-        <p:nvSpPr>
-          <p:cNvPr id="42" name="example_4_body_0"/>
-          <p:cNvSpPr txBox="1"/>
-          <p:nvPr/>
-        </p:nvSpPr>
-        <p:spPr>
-          <a:xfrm>
-            <a:off x="5120640" y="4050791"/>
-            <a:ext cx="2167128" cy="310896"/>
-          </a:xfrm>
-          <a:prstGeom prst="rect">
-            <a:avLst/>
-          </a:prstGeom>
-          <a:noFill/>
-        </p:spPr>
-        <p:txBody>
-          <a:bodyPr wrap="square" anchor="ctr" lIns="0" rIns="0" tIns="0" bIns="0">
-            <a:spAutoFit/>
-          </a:bodyPr>
-          <a:lstStyle/>
-          <a:p>
-            <a:r>
-              <a:rPr sz="1600" b="0">
-                <a:solidFill>
-                  <a:srgbClr val="5F6B7A"/>
-                </a:solidFill>
-              </a:rPr>
-              <a:t>Five-Item Layout Example</a:t>
-            </a:r>
-          </a:p>
-        </p:txBody>
-      </p:sp>
-      <p:sp>
-        <p:nvSpPr>
-          <p:cNvPr id="43" name="example_4_body_1"/>
-          <p:cNvSpPr txBox="1"/>
-          <p:nvPr/>
-        </p:nvSpPr>
-        <p:spPr>
-          <a:xfrm>
-            <a:off x="5120640" y="4434840"/>
-            <a:ext cx="2167128" cy="310896"/>
-          </a:xfrm>
-          <a:prstGeom prst="rect">
-            <a:avLst/>
-          </a:prstGeom>
-          <a:noFill/>
-        </p:spPr>
-        <p:txBody>
-          <a:bodyPr wrap="square" anchor="ctr" lIns="0" rIns="0" tIns="0" bIns="0">
-            <a:spAutoFit/>
-          </a:bodyPr>
-          <a:lstStyle/>
-          <a:p>
-            <a:r>
-              <a:rPr sz="1600" b="0">
-                <a:solidFill>
-                  <a:srgbClr val="5F6B7A"/>
-                </a:solidFill>
-              </a:rPr>
-              <a:t>2 headings · 200 chars</a:t>
-            </a:r>
-          </a:p>
-        </p:txBody>
-      </p:sp>
-      <p:sp>
-        <p:nvSpPr>
-          <p:cNvPr id="44" name="example_5_card"/>
-          <p:cNvSpPr/>
-          <p:nvPr/>
-        </p:nvSpPr>
-        <p:spPr>
-          <a:xfrm>
-            <a:off x="7973568" y="3410712"/>
-            <a:ext cx="3154680" cy="1737360"/>
-          </a:xfrm>
-          <a:prstGeom prst="roundRect">
-            <a:avLst/>
-          </a:prstGeom>
-          <a:solidFill>
-            <a:srgbClr val="FFFDF8"/>
-          </a:solidFill>
-          <a:ln>
-            <a:solidFill>
-              <a:srgbClr val="D7CDBD"/>
-            </a:solidFill>
-          </a:ln>
-        </p:spPr>
-        <p:style>
-          <a:lnRef idx="1">
-            <a:schemeClr val="accent1"/>
-          </a:lnRef>
-          <a:fillRef idx="3">
-            <a:schemeClr val="accent1"/>
-          </a:fillRef>
-          <a:effectRef idx="2">
-            <a:schemeClr val="accent1"/>
-          </a:effectRef>
-          <a:fontRef idx="minor">
-            <a:schemeClr val="lt1"/>
-          </a:fontRef>
-        </p:style>
-        <p:txBody>
-          <a:bodyPr rtlCol="0" anchor="ctr"/>
-          <a:lstStyle/>
-          <a:p>
-            <a:pPr algn="ctr"/>
-          </a:p>
-        </p:txBody>
-      </p:sp>
-      <p:sp>
-        <p:nvSpPr>
-          <p:cNvPr id="45" name="example_5_icon_doc"/>
-          <p:cNvSpPr/>
-          <p:nvPr/>
-        </p:nvSpPr>
-        <p:spPr>
-          <a:xfrm>
-            <a:off x="8138160" y="3575304"/>
-            <a:ext cx="285292" cy="368503"/>
-          </a:xfrm>
-          <a:prstGeom prst="roundRect">
-            <a:avLst/>
-          </a:prstGeom>
-          <a:solidFill>
-            <a:srgbClr val="111827"/>
-          </a:solidFill>
-          <a:ln>
-            <a:solidFill>
-              <a:srgbClr val="111827"/>
-            </a:solidFill>
-          </a:ln>
-        </p:spPr>
-        <p:style>
-          <a:lnRef idx="1">
-            <a:schemeClr val="accent1"/>
-          </a:lnRef>
-          <a:fillRef idx="3">
-            <a:schemeClr val="accent1"/>
-          </a:fillRef>
-          <a:effectRef idx="2">
-            <a:schemeClr val="accent1"/>
-          </a:effectRef>
-          <a:fontRef idx="minor">
-            <a:schemeClr val="lt1"/>
-          </a:fontRef>
-        </p:style>
-        <p:txBody>
-          <a:bodyPr rtlCol="0" anchor="ctr"/>
-          <a:lstStyle/>
-          <a:p>
-            <a:pPr algn="ctr"/>
-          </a:p>
-        </p:txBody>
-      </p:sp>
-      <p:sp>
-        <p:nvSpPr>
-          <p:cNvPr id="46" name="example_5_icon_line_0"/>
-          <p:cNvSpPr/>
-          <p:nvPr/>
-        </p:nvSpPr>
-        <p:spPr>
-          <a:xfrm>
-            <a:off x="8209483" y="3670401"/>
-            <a:ext cx="148590" cy="20802"/>
-          </a:xfrm>
-          <a:prstGeom prst="rect">
-            <a:avLst/>
-          </a:prstGeom>
-          <a:solidFill>
-            <a:srgbClr val="F7F2EA"/>
-          </a:solidFill>
-          <a:ln>
-            <a:solidFill>
-              <a:srgbClr val="F7F2EA"/>
-            </a:solidFill>
-          </a:ln>
-        </p:spPr>
-        <p:style>
-          <a:lnRef idx="1">
-            <a:schemeClr val="accent1"/>
-          </a:lnRef>
-          <a:fillRef idx="3">
-            <a:schemeClr val="accent1"/>
-          </a:fillRef>
-          <a:effectRef idx="2">
-            <a:schemeClr val="accent1"/>
-          </a:effectRef>
-          <a:fontRef idx="minor">
-            <a:schemeClr val="lt1"/>
-          </a:fontRef>
-        </p:style>
-        <p:txBody>
-          <a:bodyPr rtlCol="0" anchor="ctr"/>
-          <a:lstStyle/>
-          <a:p>
-            <a:pPr algn="ctr"/>
-          </a:p>
-        </p:txBody>
-      </p:sp>
-      <p:sp>
-        <p:nvSpPr>
-          <p:cNvPr id="47" name="example_5_icon_line_1"/>
-          <p:cNvSpPr/>
-          <p:nvPr/>
-        </p:nvSpPr>
-        <p:spPr>
-          <a:xfrm>
-            <a:off x="8209483" y="3747668"/>
-            <a:ext cx="148590" cy="20802"/>
-          </a:xfrm>
-          <a:prstGeom prst="rect">
-            <a:avLst/>
-          </a:prstGeom>
-          <a:solidFill>
-            <a:srgbClr val="F7F2EA"/>
-          </a:solidFill>
-          <a:ln>
-            <a:solidFill>
-              <a:srgbClr val="F7F2EA"/>
-            </a:solidFill>
-          </a:ln>
-        </p:spPr>
-        <p:style>
-          <a:lnRef idx="1">
-            <a:schemeClr val="accent1"/>
-          </a:lnRef>
-          <a:fillRef idx="3">
-            <a:schemeClr val="accent1"/>
-          </a:fillRef>
-          <a:effectRef idx="2">
-            <a:schemeClr val="accent1"/>
-          </a:effectRef>
-          <a:fontRef idx="minor">
-            <a:schemeClr val="lt1"/>
-          </a:fontRef>
-        </p:style>
-        <p:txBody>
-          <a:bodyPr rtlCol="0" anchor="ctr"/>
-          <a:lstStyle/>
-          <a:p>
-            <a:pPr algn="ctr"/>
-          </a:p>
-        </p:txBody>
-      </p:sp>
-      <p:sp>
-        <p:nvSpPr>
-          <p:cNvPr id="48" name="example_5_icon_line_2"/>
-          <p:cNvSpPr/>
-          <p:nvPr/>
-        </p:nvSpPr>
-        <p:spPr>
-          <a:xfrm>
-            <a:off x="8209483" y="3824935"/>
-            <a:ext cx="148590" cy="20802"/>
-          </a:xfrm>
-          <a:prstGeom prst="rect">
-            <a:avLst/>
-          </a:prstGeom>
-          <a:solidFill>
-            <a:srgbClr val="F7F2EA"/>
-          </a:solidFill>
-          <a:ln>
-            <a:solidFill>
-              <a:srgbClr val="F7F2EA"/>
-            </a:solidFill>
-          </a:ln>
-        </p:spPr>
-        <p:style>
-          <a:lnRef idx="1">
-            <a:schemeClr val="accent1"/>
-          </a:lnRef>
-          <a:fillRef idx="3">
-            <a:schemeClr val="accent1"/>
-          </a:fillRef>
-          <a:effectRef idx="2">
-            <a:schemeClr val="accent1"/>
-          </a:effectRef>
-          <a:fontRef idx="minor">
-            <a:schemeClr val="lt1"/>
-          </a:fontRef>
-        </p:style>
-        <p:txBody>
-          <a:bodyPr rtlCol="0" anchor="ctr"/>
-          <a:lstStyle/>
-          <a:p>
-            <a:pPr algn="ctr"/>
-          </a:p>
-        </p:txBody>
-      </p:sp>
-      <p:sp>
-        <p:nvSpPr>
-          <p:cNvPr id="49" name="example_5_title"/>
-          <p:cNvSpPr txBox="1"/>
-          <p:nvPr/>
-        </p:nvSpPr>
-        <p:spPr>
-          <a:xfrm>
-            <a:off x="8778240" y="3593592"/>
-            <a:ext cx="2167128" cy="347472"/>
-          </a:xfrm>
-          <a:prstGeom prst="rect">
-            <a:avLst/>
-          </a:prstGeom>
-          <a:noFill/>
-        </p:spPr>
-        <p:txBody>
-          <a:bodyPr wrap="square" anchor="ctr" lIns="0" rIns="0" tIns="0" bIns="0">
-            <a:spAutoFit/>
-          </a:bodyPr>
-          <a:lstStyle/>
-          <a:p>
-            <a:r>
-              <a:rPr sz="1800" b="1">
-                <a:solidFill>
-                  <a:srgbClr val="7C3AED"/>
-                </a:solidFill>
-              </a:rPr>
-              <a:t>Theme Preview</a:t>
-            </a:r>
-          </a:p>
-        </p:txBody>
-      </p:sp>
-      <p:sp>
-        <p:nvSpPr>
-          <p:cNvPr id="50" name="example_5_body_0"/>
-          <p:cNvSpPr txBox="1"/>
-          <p:nvPr/>
-        </p:nvSpPr>
-        <p:spPr>
-          <a:xfrm>
-            <a:off x="8778240" y="4050791"/>
-            <a:ext cx="2167128" cy="310896"/>
-          </a:xfrm>
-          <a:prstGeom prst="rect">
-            <a:avLst/>
-          </a:prstGeom>
-          <a:noFill/>
-        </p:spPr>
-        <p:txBody>
-          <a:bodyPr wrap="square" anchor="ctr" lIns="0" rIns="0" tIns="0" bIns="0">
-            <a:spAutoFit/>
-          </a:bodyPr>
-          <a:lstStyle/>
-          <a:p>
-            <a:r>
-              <a:rPr sz="1600" b="0">
-                <a:solidFill>
-                  <a:srgbClr val="5F6B7A"/>
-                </a:solidFill>
-              </a:rPr>
               <a:t>MDPR Design Grammar</a:t>
             </a:r>
           </a:p>
@@ -12962,7 +12692,7 @@
       </p:sp>
       <p:sp>
         <p:nvSpPr>
-          <p:cNvPr id="51" name="example_5_body_1"/>
+          <p:cNvPr id="45" name="example_5_body_1"/>
           <p:cNvSpPr txBox="1"/>
           <p:nvPr/>
         </p:nvSpPr>

--- a/artifacts/mdpr-vs-skill/mdpr-skill-from-actual-md-run.pptx
+++ b/artifacts/mdpr-vs-skill/mdpr-skill-from-actual-md-run.pptx
@@ -4023,7 +4023,7 @@
                   <a:srgbClr val="5F6B7A"/>
                 </a:solidFill>
               </a:rPr>
-              <a:t>344 editable text frames</a:t>
+              <a:t>345 editable text frames</a:t>
             </a:r>
           </a:p>
         </p:txBody>

--- a/artifacts/mdpr-vs-skill/mdpr-skill-from-actual-md-run.pptx
+++ b/artifacts/mdpr-vs-skill/mdpr-skill-from-actual-md-run.pptx
@@ -5598,7 +5598,7 @@
                   <a:srgbClr val="5F6B7A"/>
                 </a:solidFill>
               </a:rPr>
-              <a:t>deck.md</a:t>
+              <a:t>basic/deck.md</a:t>
             </a:r>
           </a:p>
         </p:txBody>
@@ -5631,7 +5631,7 @@
                   <a:srgbClr val="5F6B7A"/>
                 </a:solidFill>
               </a:rPr>
-              <a:t>deck.md</a:t>
+              <a:t>comparison/deck.md</a:t>
             </a:r>
           </a:p>
         </p:txBody>
@@ -5664,7 +5664,7 @@
                   <a:srgbClr val="5F6B7A"/>
                 </a:solidFill>
               </a:rPr>
-              <a:t>deck.md</a:t>
+              <a:t>pipeline/deck.md</a:t>
             </a:r>
           </a:p>
         </p:txBody>
